--- a/docs/pptx/whole/ritu-linsubhr-ratio-grade3.pptx
+++ b/docs/pptx/whole/ritu-linsubhr-ratio-grade3.pptx
@@ -2443,7 +2443,7 @@
           </p:nvSpPr>
           <p:spPr>
             <a:xfrm>
-              <a:off x="1424129" y="2073503"/>
+              <a:off x="1425728" y="2073503"/>
               <a:ext cx="0" cy="3649639"/>
             </a:xfrm>
             <a:custGeom>
@@ -2486,7 +2486,7 @@
           </p:nvSpPr>
           <p:spPr>
             <a:xfrm>
-              <a:off x="3298684" y="2073503"/>
+              <a:off x="3298283" y="2073503"/>
               <a:ext cx="0" cy="3649639"/>
             </a:xfrm>
             <a:custGeom>
@@ -2529,7 +2529,7 @@
           </p:nvSpPr>
           <p:spPr>
             <a:xfrm>
-              <a:off x="5173239" y="2073503"/>
+              <a:off x="5170839" y="2073503"/>
               <a:ext cx="0" cy="3649639"/>
             </a:xfrm>
             <a:custGeom>
@@ -2572,7 +2572,7 @@
           </p:nvSpPr>
           <p:spPr>
             <a:xfrm>
-              <a:off x="7047795" y="2073503"/>
+              <a:off x="7043395" y="2073503"/>
               <a:ext cx="0" cy="3649639"/>
             </a:xfrm>
             <a:custGeom>
@@ -2830,7 +2830,7 @@
           </p:nvSpPr>
           <p:spPr>
             <a:xfrm>
-              <a:off x="2361407" y="2073503"/>
+              <a:off x="2362006" y="2073503"/>
               <a:ext cx="0" cy="3649639"/>
             </a:xfrm>
             <a:custGeom>
@@ -2873,7 +2873,7 @@
           </p:nvSpPr>
           <p:spPr>
             <a:xfrm>
-              <a:off x="4235962" y="2073503"/>
+              <a:off x="4234561" y="2073503"/>
               <a:ext cx="0" cy="3649639"/>
             </a:xfrm>
             <a:custGeom>
@@ -2916,7 +2916,7 @@
           </p:nvSpPr>
           <p:spPr>
             <a:xfrm>
-              <a:off x="6110517" y="2073503"/>
+              <a:off x="6107117" y="2073503"/>
               <a:ext cx="0" cy="3649639"/>
             </a:xfrm>
             <a:custGeom>
@@ -2959,7 +2959,7 @@
           </p:nvSpPr>
           <p:spPr>
             <a:xfrm>
-              <a:off x="7985072" y="2073503"/>
+              <a:off x="7979673" y="2073503"/>
               <a:ext cx="0" cy="3649639"/>
             </a:xfrm>
             <a:custGeom>
@@ -3003,542 +3003,542 @@
           <p:spPr>
             <a:xfrm>
               <a:off x="1172049" y="2073503"/>
-              <a:ext cx="7090630" cy="3467698"/>
+              <a:ext cx="7090630" cy="3467886"/>
             </a:xfrm>
             <a:custGeom>
               <a:avLst/>
               <a:pathLst>
-                <a:path w="7090630" h="3467698">
+                <a:path w="7090630" h="3467886">
                   <a:moveTo>
-                    <a:pt x="1705526" y="0"/>
+                    <a:pt x="1710025" y="0"/>
                   </a:moveTo>
                   <a:lnTo>
-                    <a:pt x="1718940" y="47735"/>
-                  </a:lnTo>
-                  <a:lnTo>
-                    <a:pt x="1790563" y="285001"/>
-                  </a:lnTo>
-                  <a:lnTo>
-                    <a:pt x="1862185" y="505884"/>
-                  </a:lnTo>
-                  <a:lnTo>
-                    <a:pt x="1933808" y="711514"/>
-                  </a:lnTo>
-                  <a:lnTo>
-                    <a:pt x="2005430" y="902945"/>
-                  </a:lnTo>
-                  <a:lnTo>
-                    <a:pt x="2077053" y="1081157"/>
-                  </a:lnTo>
-                  <a:lnTo>
-                    <a:pt x="2148675" y="1247062"/>
-                  </a:lnTo>
-                  <a:lnTo>
-                    <a:pt x="2220298" y="1401512"/>
-                  </a:lnTo>
-                  <a:lnTo>
-                    <a:pt x="2291920" y="1545296"/>
-                  </a:lnTo>
-                  <a:lnTo>
-                    <a:pt x="2363543" y="1679152"/>
-                  </a:lnTo>
-                  <a:lnTo>
-                    <a:pt x="2435165" y="1803764"/>
-                  </a:lnTo>
-                  <a:lnTo>
-                    <a:pt x="2506788" y="1919772"/>
-                  </a:lnTo>
-                  <a:lnTo>
-                    <a:pt x="2578410" y="2027769"/>
-                  </a:lnTo>
-                  <a:lnTo>
-                    <a:pt x="2650033" y="2128308"/>
-                  </a:lnTo>
-                  <a:lnTo>
-                    <a:pt x="2721655" y="2221905"/>
-                  </a:lnTo>
-                  <a:lnTo>
-                    <a:pt x="2793278" y="2309039"/>
-                  </a:lnTo>
-                  <a:lnTo>
-                    <a:pt x="2864901" y="2390156"/>
-                  </a:lnTo>
-                  <a:lnTo>
-                    <a:pt x="2936523" y="2465672"/>
-                  </a:lnTo>
-                  <a:lnTo>
-                    <a:pt x="3008146" y="2535973"/>
-                  </a:lnTo>
-                  <a:lnTo>
-                    <a:pt x="3079768" y="2601419"/>
-                  </a:lnTo>
-                  <a:lnTo>
-                    <a:pt x="3151391" y="2657440"/>
-                  </a:lnTo>
-                  <a:lnTo>
-                    <a:pt x="3223013" y="2680198"/>
-                  </a:lnTo>
-                  <a:lnTo>
-                    <a:pt x="3294636" y="2702330"/>
-                  </a:lnTo>
-                  <a:lnTo>
-                    <a:pt x="3366258" y="2723852"/>
-                  </a:lnTo>
-                  <a:lnTo>
-                    <a:pt x="3437881" y="2744781"/>
-                  </a:lnTo>
-                  <a:lnTo>
-                    <a:pt x="3509503" y="2765134"/>
-                  </a:lnTo>
-                  <a:lnTo>
-                    <a:pt x="3581126" y="2784926"/>
-                  </a:lnTo>
-                  <a:lnTo>
-                    <a:pt x="3652748" y="2804174"/>
-                  </a:lnTo>
-                  <a:lnTo>
-                    <a:pt x="3724371" y="2822891"/>
-                  </a:lnTo>
-                  <a:lnTo>
-                    <a:pt x="3795993" y="2841092"/>
-                  </a:lnTo>
-                  <a:lnTo>
-                    <a:pt x="3867616" y="2858792"/>
-                  </a:lnTo>
-                  <a:lnTo>
-                    <a:pt x="3939238" y="2876005"/>
-                  </a:lnTo>
-                  <a:lnTo>
-                    <a:pt x="4010861" y="2892744"/>
-                  </a:lnTo>
-                  <a:lnTo>
-                    <a:pt x="4082483" y="2909022"/>
-                  </a:lnTo>
-                  <a:lnTo>
-                    <a:pt x="4154106" y="2924851"/>
-                  </a:lnTo>
-                  <a:lnTo>
-                    <a:pt x="4225729" y="2940244"/>
-                  </a:lnTo>
-                  <a:lnTo>
-                    <a:pt x="4297351" y="2955214"/>
-                  </a:lnTo>
-                  <a:lnTo>
-                    <a:pt x="4368974" y="2969771"/>
-                  </a:lnTo>
-                  <a:lnTo>
-                    <a:pt x="4440596" y="2983927"/>
-                  </a:lnTo>
-                  <a:lnTo>
-                    <a:pt x="4512219" y="2997693"/>
-                  </a:lnTo>
-                  <a:lnTo>
-                    <a:pt x="4583841" y="3011080"/>
-                  </a:lnTo>
-                  <a:lnTo>
-                    <a:pt x="4655464" y="3024098"/>
-                  </a:lnTo>
-                  <a:lnTo>
-                    <a:pt x="4727086" y="3036758"/>
-                  </a:lnTo>
-                  <a:lnTo>
-                    <a:pt x="4798709" y="3049069"/>
-                  </a:lnTo>
-                  <a:lnTo>
-                    <a:pt x="4870331" y="3061041"/>
-                  </a:lnTo>
-                  <a:lnTo>
-                    <a:pt x="4941954" y="3072684"/>
+                    <a:pt x="1718940" y="31969"/>
+                  </a:lnTo>
+                  <a:lnTo>
+                    <a:pt x="1790563" y="271024"/>
+                  </a:lnTo>
+                  <a:lnTo>
+                    <a:pt x="1862185" y="493523"/>
+                  </a:lnTo>
+                  <a:lnTo>
+                    <a:pt x="1933808" y="700612"/>
+                  </a:lnTo>
+                  <a:lnTo>
+                    <a:pt x="2005430" y="893360"/>
+                  </a:lnTo>
+                  <a:lnTo>
+                    <a:pt x="2077053" y="1072759"/>
+                  </a:lnTo>
+                  <a:lnTo>
+                    <a:pt x="2148675" y="1239733"/>
+                  </a:lnTo>
+                  <a:lnTo>
+                    <a:pt x="2220298" y="1395143"/>
+                  </a:lnTo>
+                  <a:lnTo>
+                    <a:pt x="2291920" y="1539791"/>
+                  </a:lnTo>
+                  <a:lnTo>
+                    <a:pt x="2363543" y="1674420"/>
+                  </a:lnTo>
+                  <a:lnTo>
+                    <a:pt x="2435165" y="1799726"/>
+                  </a:lnTo>
+                  <a:lnTo>
+                    <a:pt x="2506788" y="1916354"/>
+                  </a:lnTo>
+                  <a:lnTo>
+                    <a:pt x="2578410" y="2024905"/>
+                  </a:lnTo>
+                  <a:lnTo>
+                    <a:pt x="2650033" y="2125938"/>
+                  </a:lnTo>
+                  <a:lnTo>
+                    <a:pt x="2721655" y="2219973"/>
+                  </a:lnTo>
+                  <a:lnTo>
+                    <a:pt x="2793278" y="2307497"/>
+                  </a:lnTo>
+                  <a:lnTo>
+                    <a:pt x="2864901" y="2388959"/>
+                  </a:lnTo>
+                  <a:lnTo>
+                    <a:pt x="2936523" y="2464779"/>
+                  </a:lnTo>
+                  <a:lnTo>
+                    <a:pt x="3008146" y="2535348"/>
+                  </a:lnTo>
+                  <a:lnTo>
+                    <a:pt x="3079768" y="2601030"/>
+                  </a:lnTo>
+                  <a:lnTo>
+                    <a:pt x="3151391" y="2657359"/>
+                  </a:lnTo>
+                  <a:lnTo>
+                    <a:pt x="3223013" y="2680122"/>
+                  </a:lnTo>
+                  <a:lnTo>
+                    <a:pt x="3294636" y="2702259"/>
+                  </a:lnTo>
+                  <a:lnTo>
+                    <a:pt x="3366258" y="2723786"/>
+                  </a:lnTo>
+                  <a:lnTo>
+                    <a:pt x="3437881" y="2744720"/>
+                  </a:lnTo>
+                  <a:lnTo>
+                    <a:pt x="3509503" y="2765077"/>
+                  </a:lnTo>
+                  <a:lnTo>
+                    <a:pt x="3581126" y="2784874"/>
+                  </a:lnTo>
+                  <a:lnTo>
+                    <a:pt x="3652748" y="2804125"/>
+                  </a:lnTo>
+                  <a:lnTo>
+                    <a:pt x="3724371" y="2822846"/>
+                  </a:lnTo>
+                  <a:lnTo>
+                    <a:pt x="3795993" y="2841051"/>
+                  </a:lnTo>
+                  <a:lnTo>
+                    <a:pt x="3867616" y="2858755"/>
+                  </a:lnTo>
+                  <a:lnTo>
+                    <a:pt x="3939238" y="2875971"/>
+                  </a:lnTo>
+                  <a:lnTo>
+                    <a:pt x="4010861" y="2892712"/>
+                  </a:lnTo>
+                  <a:lnTo>
+                    <a:pt x="4082483" y="2908993"/>
+                  </a:lnTo>
+                  <a:lnTo>
+                    <a:pt x="4154106" y="2924825"/>
+                  </a:lnTo>
+                  <a:lnTo>
+                    <a:pt x="4225729" y="2940221"/>
+                  </a:lnTo>
+                  <a:lnTo>
+                    <a:pt x="4297351" y="2955193"/>
+                  </a:lnTo>
+                  <a:lnTo>
+                    <a:pt x="4368974" y="2969753"/>
+                  </a:lnTo>
+                  <a:lnTo>
+                    <a:pt x="4440596" y="2983911"/>
+                  </a:lnTo>
+                  <a:lnTo>
+                    <a:pt x="4512219" y="2997680"/>
+                  </a:lnTo>
+                  <a:lnTo>
+                    <a:pt x="4583841" y="3011069"/>
+                  </a:lnTo>
+                  <a:lnTo>
+                    <a:pt x="4655464" y="3024089"/>
+                  </a:lnTo>
+                  <a:lnTo>
+                    <a:pt x="4727086" y="3036751"/>
+                  </a:lnTo>
+                  <a:lnTo>
+                    <a:pt x="4798709" y="3049064"/>
+                  </a:lnTo>
+                  <a:lnTo>
+                    <a:pt x="4870331" y="3061038"/>
+                  </a:lnTo>
+                  <a:lnTo>
+                    <a:pt x="4941954" y="3072682"/>
                   </a:lnTo>
                   <a:lnTo>
                     <a:pt x="5013576" y="3084005"/>
                   </a:lnTo>
                   <a:lnTo>
-                    <a:pt x="5085199" y="3095015"/>
-                  </a:lnTo>
-                  <a:lnTo>
-                    <a:pt x="5156821" y="3105722"/>
-                  </a:lnTo>
-                  <a:lnTo>
-                    <a:pt x="5228444" y="3116134"/>
-                  </a:lnTo>
-                  <a:lnTo>
-                    <a:pt x="5300066" y="3126258"/>
-                  </a:lnTo>
-                  <a:lnTo>
-                    <a:pt x="5371689" y="3136105"/>
-                  </a:lnTo>
-                  <a:lnTo>
-                    <a:pt x="5443311" y="3145679"/>
-                  </a:lnTo>
-                  <a:lnTo>
-                    <a:pt x="5514934" y="3154991"/>
-                  </a:lnTo>
-                  <a:lnTo>
-                    <a:pt x="5586557" y="3164045"/>
-                  </a:lnTo>
-                  <a:lnTo>
-                    <a:pt x="5658179" y="3172851"/>
-                  </a:lnTo>
-                  <a:lnTo>
-                    <a:pt x="5729802" y="3181413"/>
-                  </a:lnTo>
-                  <a:lnTo>
-                    <a:pt x="5801424" y="3189740"/>
-                  </a:lnTo>
-                  <a:lnTo>
-                    <a:pt x="5873047" y="3197838"/>
-                  </a:lnTo>
-                  <a:lnTo>
-                    <a:pt x="5944669" y="3205713"/>
-                  </a:lnTo>
-                  <a:lnTo>
-                    <a:pt x="6016292" y="3213370"/>
-                  </a:lnTo>
-                  <a:lnTo>
-                    <a:pt x="6087914" y="3220817"/>
-                  </a:lnTo>
-                  <a:lnTo>
-                    <a:pt x="6159537" y="3228059"/>
-                  </a:lnTo>
-                  <a:lnTo>
-                    <a:pt x="6231159" y="3235101"/>
-                  </a:lnTo>
-                  <a:lnTo>
-                    <a:pt x="6302782" y="3241949"/>
-                  </a:lnTo>
-                  <a:lnTo>
-                    <a:pt x="6374404" y="3248609"/>
-                  </a:lnTo>
-                  <a:lnTo>
-                    <a:pt x="6446027" y="3255085"/>
-                  </a:lnTo>
-                  <a:lnTo>
-                    <a:pt x="6517649" y="3261383"/>
-                  </a:lnTo>
-                  <a:lnTo>
-                    <a:pt x="6589272" y="3267508"/>
-                  </a:lnTo>
-                  <a:lnTo>
-                    <a:pt x="6660894" y="3273463"/>
-                  </a:lnTo>
-                  <a:lnTo>
-                    <a:pt x="6732517" y="3279255"/>
-                  </a:lnTo>
-                  <a:lnTo>
-                    <a:pt x="6804139" y="3284887"/>
-                  </a:lnTo>
-                  <a:lnTo>
-                    <a:pt x="6875762" y="3290364"/>
-                  </a:lnTo>
-                  <a:lnTo>
-                    <a:pt x="6947385" y="3295691"/>
-                  </a:lnTo>
-                  <a:lnTo>
-                    <a:pt x="7019007" y="3300870"/>
-                  </a:lnTo>
-                  <a:lnTo>
-                    <a:pt x="7090630" y="3305907"/>
-                  </a:lnTo>
-                  <a:lnTo>
-                    <a:pt x="7090630" y="3467698"/>
-                  </a:lnTo>
-                  <a:lnTo>
-                    <a:pt x="7019007" y="3466508"/>
-                  </a:lnTo>
-                  <a:lnTo>
-                    <a:pt x="6947385" y="3465229"/>
-                  </a:lnTo>
-                  <a:lnTo>
-                    <a:pt x="6875762" y="3463855"/>
-                  </a:lnTo>
-                  <a:lnTo>
-                    <a:pt x="6804139" y="3462380"/>
-                  </a:lnTo>
-                  <a:lnTo>
-                    <a:pt x="6732517" y="3460795"/>
-                  </a:lnTo>
-                  <a:lnTo>
-                    <a:pt x="6660894" y="3459093"/>
-                  </a:lnTo>
-                  <a:lnTo>
-                    <a:pt x="6589272" y="3457264"/>
-                  </a:lnTo>
-                  <a:lnTo>
-                    <a:pt x="6517649" y="3455300"/>
-                  </a:lnTo>
-                  <a:lnTo>
-                    <a:pt x="6446027" y="3453190"/>
-                  </a:lnTo>
-                  <a:lnTo>
-                    <a:pt x="6374404" y="3450923"/>
-                  </a:lnTo>
-                  <a:lnTo>
-                    <a:pt x="6302782" y="3448489"/>
-                  </a:lnTo>
-                  <a:lnTo>
-                    <a:pt x="6231159" y="3445873"/>
-                  </a:lnTo>
-                  <a:lnTo>
-                    <a:pt x="6159537" y="3443064"/>
-                  </a:lnTo>
-                  <a:lnTo>
-                    <a:pt x="6087914" y="3440047"/>
-                  </a:lnTo>
-                  <a:lnTo>
-                    <a:pt x="6016292" y="3436805"/>
-                  </a:lnTo>
-                  <a:lnTo>
-                    <a:pt x="5944669" y="3433323"/>
-                  </a:lnTo>
-                  <a:lnTo>
-                    <a:pt x="5873047" y="3429583"/>
-                  </a:lnTo>
-                  <a:lnTo>
-                    <a:pt x="5801424" y="3425566"/>
-                  </a:lnTo>
-                  <a:lnTo>
-                    <a:pt x="5729802" y="3421250"/>
-                  </a:lnTo>
-                  <a:lnTo>
-                    <a:pt x="5658179" y="3416614"/>
-                  </a:lnTo>
-                  <a:lnTo>
-                    <a:pt x="5586557" y="3411635"/>
-                  </a:lnTo>
-                  <a:lnTo>
-                    <a:pt x="5514934" y="3406286"/>
-                  </a:lnTo>
-                  <a:lnTo>
-                    <a:pt x="5443311" y="3400540"/>
-                  </a:lnTo>
-                  <a:lnTo>
-                    <a:pt x="5371689" y="3394369"/>
-                  </a:lnTo>
-                  <a:lnTo>
-                    <a:pt x="5300066" y="3387739"/>
-                  </a:lnTo>
-                  <a:lnTo>
-                    <a:pt x="5228444" y="3380618"/>
-                  </a:lnTo>
-                  <a:lnTo>
-                    <a:pt x="5156821" y="3372968"/>
-                  </a:lnTo>
-                  <a:lnTo>
-                    <a:pt x="5085199" y="3364751"/>
-                  </a:lnTo>
-                  <a:lnTo>
-                    <a:pt x="5013576" y="3355925"/>
-                  </a:lnTo>
-                  <a:lnTo>
-                    <a:pt x="4941954" y="3346444"/>
-                  </a:lnTo>
-                  <a:lnTo>
-                    <a:pt x="4870331" y="3336259"/>
-                  </a:lnTo>
-                  <a:lnTo>
-                    <a:pt x="4798709" y="3325319"/>
-                  </a:lnTo>
-                  <a:lnTo>
-                    <a:pt x="4727086" y="3313568"/>
-                  </a:lnTo>
-                  <a:lnTo>
-                    <a:pt x="4655464" y="3300945"/>
-                  </a:lnTo>
-                  <a:lnTo>
-                    <a:pt x="4583841" y="3287386"/>
-                  </a:lnTo>
-                  <a:lnTo>
-                    <a:pt x="4512219" y="3272821"/>
-                  </a:lnTo>
-                  <a:lnTo>
-                    <a:pt x="4440596" y="3257175"/>
-                  </a:lnTo>
-                  <a:lnTo>
-                    <a:pt x="4368974" y="3240369"/>
-                  </a:lnTo>
-                  <a:lnTo>
-                    <a:pt x="4297351" y="3222317"/>
-                  </a:lnTo>
-                  <a:lnTo>
-                    <a:pt x="4225729" y="3202925"/>
-                  </a:lnTo>
-                  <a:lnTo>
-                    <a:pt x="4154106" y="3182095"/>
-                  </a:lnTo>
-                  <a:lnTo>
-                    <a:pt x="4082483" y="3159721"/>
-                  </a:lnTo>
-                  <a:lnTo>
-                    <a:pt x="4010861" y="3135686"/>
-                  </a:lnTo>
-                  <a:lnTo>
-                    <a:pt x="3939238" y="3109869"/>
-                  </a:lnTo>
-                  <a:lnTo>
-                    <a:pt x="3867616" y="3082136"/>
-                  </a:lnTo>
-                  <a:lnTo>
-                    <a:pt x="3795993" y="3052347"/>
-                  </a:lnTo>
-                  <a:lnTo>
-                    <a:pt x="3724371" y="3020348"/>
-                  </a:lnTo>
-                  <a:lnTo>
-                    <a:pt x="3652748" y="2985975"/>
-                  </a:lnTo>
-                  <a:lnTo>
-                    <a:pt x="3581126" y="2949053"/>
-                  </a:lnTo>
-                  <a:lnTo>
-                    <a:pt x="3509503" y="2909392"/>
-                  </a:lnTo>
-                  <a:lnTo>
-                    <a:pt x="3437881" y="2866790"/>
-                  </a:lnTo>
-                  <a:lnTo>
-                    <a:pt x="3366258" y="2821027"/>
-                  </a:lnTo>
-                  <a:lnTo>
-                    <a:pt x="3294636" y="2771870"/>
-                  </a:lnTo>
-                  <a:lnTo>
-                    <a:pt x="3223013" y="2719067"/>
-                  </a:lnTo>
-                  <a:lnTo>
-                    <a:pt x="3151391" y="2662347"/>
-                  </a:lnTo>
-                  <a:lnTo>
-                    <a:pt x="3079768" y="2634037"/>
-                  </a:lnTo>
-                  <a:lnTo>
-                    <a:pt x="3008146" y="2609971"/>
-                  </a:lnTo>
-                  <a:lnTo>
-                    <a:pt x="2936523" y="2585223"/>
-                  </a:lnTo>
-                  <a:lnTo>
-                    <a:pt x="2864901" y="2559775"/>
-                  </a:lnTo>
-                  <a:lnTo>
-                    <a:pt x="2793278" y="2533606"/>
-                  </a:lnTo>
-                  <a:lnTo>
-                    <a:pt x="2721655" y="2506695"/>
-                  </a:lnTo>
-                  <a:lnTo>
-                    <a:pt x="2650033" y="2479023"/>
-                  </a:lnTo>
-                  <a:lnTo>
-                    <a:pt x="2578410" y="2450567"/>
-                  </a:lnTo>
-                  <a:lnTo>
-                    <a:pt x="2506788" y="2421304"/>
-                  </a:lnTo>
-                  <a:lnTo>
-                    <a:pt x="2435165" y="2391213"/>
-                  </a:lnTo>
-                  <a:lnTo>
-                    <a:pt x="2363543" y="2360270"/>
-                  </a:lnTo>
-                  <a:lnTo>
-                    <a:pt x="2291920" y="2328450"/>
-                  </a:lnTo>
-                  <a:lnTo>
-                    <a:pt x="2220298" y="2295730"/>
-                  </a:lnTo>
-                  <a:lnTo>
-                    <a:pt x="2148675" y="2262082"/>
-                  </a:lnTo>
-                  <a:lnTo>
-                    <a:pt x="2077053" y="2227482"/>
-                  </a:lnTo>
-                  <a:lnTo>
-                    <a:pt x="2005430" y="2191901"/>
-                  </a:lnTo>
-                  <a:lnTo>
-                    <a:pt x="1933808" y="2155313"/>
-                  </a:lnTo>
-                  <a:lnTo>
-                    <a:pt x="1862185" y="2117688"/>
-                  </a:lnTo>
-                  <a:lnTo>
-                    <a:pt x="1790563" y="2078998"/>
-                  </a:lnTo>
-                  <a:lnTo>
-                    <a:pt x="1718940" y="2039212"/>
-                  </a:lnTo>
-                  <a:lnTo>
-                    <a:pt x="1647318" y="1998299"/>
-                  </a:lnTo>
-                  <a:lnTo>
-                    <a:pt x="1575695" y="1956228"/>
-                  </a:lnTo>
-                  <a:lnTo>
-                    <a:pt x="1504073" y="1912965"/>
-                  </a:lnTo>
-                  <a:lnTo>
-                    <a:pt x="1432450" y="1868476"/>
-                  </a:lnTo>
-                  <a:lnTo>
-                    <a:pt x="1360827" y="1822728"/>
-                  </a:lnTo>
-                  <a:lnTo>
-                    <a:pt x="1289205" y="1775684"/>
-                  </a:lnTo>
-                  <a:lnTo>
-                    <a:pt x="1217582" y="1727307"/>
-                  </a:lnTo>
-                  <a:lnTo>
-                    <a:pt x="1145960" y="1677560"/>
-                  </a:lnTo>
-                  <a:lnTo>
-                    <a:pt x="1074337" y="1626405"/>
-                  </a:lnTo>
-                  <a:lnTo>
-                    <a:pt x="1002715" y="1573800"/>
-                  </a:lnTo>
-                  <a:lnTo>
-                    <a:pt x="931092" y="1519706"/>
-                  </a:lnTo>
-                  <a:lnTo>
-                    <a:pt x="859470" y="1464079"/>
-                  </a:lnTo>
-                  <a:lnTo>
-                    <a:pt x="787847" y="1406877"/>
-                  </a:lnTo>
-                  <a:lnTo>
-                    <a:pt x="716225" y="1348055"/>
-                  </a:lnTo>
-                  <a:lnTo>
-                    <a:pt x="644602" y="1287567"/>
-                  </a:lnTo>
-                  <a:lnTo>
-                    <a:pt x="572980" y="1225366"/>
-                  </a:lnTo>
-                  <a:lnTo>
-                    <a:pt x="501357" y="1161403"/>
-                  </a:lnTo>
-                  <a:lnTo>
-                    <a:pt x="429735" y="1095628"/>
-                  </a:lnTo>
-                  <a:lnTo>
-                    <a:pt x="358112" y="1027991"/>
-                  </a:lnTo>
-                  <a:lnTo>
-                    <a:pt x="286490" y="958438"/>
-                  </a:lnTo>
-                  <a:lnTo>
-                    <a:pt x="214867" y="886915"/>
-                  </a:lnTo>
-                  <a:lnTo>
-                    <a:pt x="143245" y="813366"/>
-                  </a:lnTo>
-                  <a:lnTo>
-                    <a:pt x="71622" y="737734"/>
-                  </a:lnTo>
-                  <a:lnTo>
-                    <a:pt x="0" y="659960"/>
+                    <a:pt x="5085199" y="3095016"/>
+                  </a:lnTo>
+                  <a:lnTo>
+                    <a:pt x="5156821" y="3105724"/>
+                  </a:lnTo>
+                  <a:lnTo>
+                    <a:pt x="5228444" y="3116137"/>
+                  </a:lnTo>
+                  <a:lnTo>
+                    <a:pt x="5300066" y="3126263"/>
+                  </a:lnTo>
+                  <a:lnTo>
+                    <a:pt x="5371689" y="3136111"/>
+                  </a:lnTo>
+                  <a:lnTo>
+                    <a:pt x="5443311" y="3145687"/>
+                  </a:lnTo>
+                  <a:lnTo>
+                    <a:pt x="5514934" y="3154999"/>
+                  </a:lnTo>
+                  <a:lnTo>
+                    <a:pt x="5586557" y="3164055"/>
+                  </a:lnTo>
+                  <a:lnTo>
+                    <a:pt x="5658179" y="3172861"/>
+                  </a:lnTo>
+                  <a:lnTo>
+                    <a:pt x="5729802" y="3181425"/>
+                  </a:lnTo>
+                  <a:lnTo>
+                    <a:pt x="5801424" y="3189752"/>
+                  </a:lnTo>
+                  <a:lnTo>
+                    <a:pt x="5873047" y="3197851"/>
+                  </a:lnTo>
+                  <a:lnTo>
+                    <a:pt x="5944669" y="3205726"/>
+                  </a:lnTo>
+                  <a:lnTo>
+                    <a:pt x="6016292" y="3213384"/>
+                  </a:lnTo>
+                  <a:lnTo>
+                    <a:pt x="6087914" y="3220832"/>
+                  </a:lnTo>
+                  <a:lnTo>
+                    <a:pt x="6159537" y="3228074"/>
+                  </a:lnTo>
+                  <a:lnTo>
+                    <a:pt x="6231159" y="3235117"/>
+                  </a:lnTo>
+                  <a:lnTo>
+                    <a:pt x="6302782" y="3241966"/>
+                  </a:lnTo>
+                  <a:lnTo>
+                    <a:pt x="6374404" y="3248626"/>
+                  </a:lnTo>
+                  <a:lnTo>
+                    <a:pt x="6446027" y="3255102"/>
+                  </a:lnTo>
+                  <a:lnTo>
+                    <a:pt x="6517649" y="3261401"/>
+                  </a:lnTo>
+                  <a:lnTo>
+                    <a:pt x="6589272" y="3267525"/>
+                  </a:lnTo>
+                  <a:lnTo>
+                    <a:pt x="6660894" y="3273481"/>
+                  </a:lnTo>
+                  <a:lnTo>
+                    <a:pt x="6732517" y="3279273"/>
+                  </a:lnTo>
+                  <a:lnTo>
+                    <a:pt x="6804139" y="3284906"/>
+                  </a:lnTo>
+                  <a:lnTo>
+                    <a:pt x="6875762" y="3290383"/>
+                  </a:lnTo>
+                  <a:lnTo>
+                    <a:pt x="6947385" y="3295709"/>
+                  </a:lnTo>
+                  <a:lnTo>
+                    <a:pt x="7019007" y="3300889"/>
+                  </a:lnTo>
+                  <a:lnTo>
+                    <a:pt x="7090630" y="3305926"/>
+                  </a:lnTo>
+                  <a:lnTo>
+                    <a:pt x="7090630" y="3467886"/>
+                  </a:lnTo>
+                  <a:lnTo>
+                    <a:pt x="7019007" y="3466705"/>
+                  </a:lnTo>
+                  <a:lnTo>
+                    <a:pt x="6947385" y="3465437"/>
+                  </a:lnTo>
+                  <a:lnTo>
+                    <a:pt x="6875762" y="3464075"/>
+                  </a:lnTo>
+                  <a:lnTo>
+                    <a:pt x="6804139" y="3462611"/>
+                  </a:lnTo>
+                  <a:lnTo>
+                    <a:pt x="6732517" y="3461039"/>
+                  </a:lnTo>
+                  <a:lnTo>
+                    <a:pt x="6660894" y="3459349"/>
+                  </a:lnTo>
+                  <a:lnTo>
+                    <a:pt x="6589272" y="3457534"/>
+                  </a:lnTo>
+                  <a:lnTo>
+                    <a:pt x="6517649" y="3455583"/>
+                  </a:lnTo>
+                  <a:lnTo>
+                    <a:pt x="6446027" y="3453488"/>
+                  </a:lnTo>
+                  <a:lnTo>
+                    <a:pt x="6374404" y="3451236"/>
+                  </a:lnTo>
+                  <a:lnTo>
+                    <a:pt x="6302782" y="3448817"/>
+                  </a:lnTo>
+                  <a:lnTo>
+                    <a:pt x="6231159" y="3446218"/>
+                  </a:lnTo>
+                  <a:lnTo>
+                    <a:pt x="6159537" y="3443425"/>
+                  </a:lnTo>
+                  <a:lnTo>
+                    <a:pt x="6087914" y="3440425"/>
+                  </a:lnTo>
+                  <a:lnTo>
+                    <a:pt x="6016292" y="3437202"/>
+                  </a:lnTo>
+                  <a:lnTo>
+                    <a:pt x="5944669" y="3433738"/>
+                  </a:lnTo>
+                  <a:lnTo>
+                    <a:pt x="5873047" y="3430017"/>
+                  </a:lnTo>
+                  <a:lnTo>
+                    <a:pt x="5801424" y="3426019"/>
+                  </a:lnTo>
+                  <a:lnTo>
+                    <a:pt x="5729802" y="3421724"/>
+                  </a:lnTo>
+                  <a:lnTo>
+                    <a:pt x="5658179" y="3417109"/>
+                  </a:lnTo>
+                  <a:lnTo>
+                    <a:pt x="5586557" y="3412151"/>
+                  </a:lnTo>
+                  <a:lnTo>
+                    <a:pt x="5514934" y="3406823"/>
+                  </a:lnTo>
+                  <a:lnTo>
+                    <a:pt x="5443311" y="3401100"/>
+                  </a:lnTo>
+                  <a:lnTo>
+                    <a:pt x="5371689" y="3394950"/>
+                  </a:lnTo>
+                  <a:lnTo>
+                    <a:pt x="5300066" y="3388343"/>
+                  </a:lnTo>
+                  <a:lnTo>
+                    <a:pt x="5228444" y="3381244"/>
+                  </a:lnTo>
+                  <a:lnTo>
+                    <a:pt x="5156821" y="3373617"/>
+                  </a:lnTo>
+                  <a:lnTo>
+                    <a:pt x="5085199" y="3365422"/>
+                  </a:lnTo>
+                  <a:lnTo>
+                    <a:pt x="5013576" y="3356618"/>
+                  </a:lnTo>
+                  <a:lnTo>
+                    <a:pt x="4941954" y="3347158"/>
+                  </a:lnTo>
+                  <a:lnTo>
+                    <a:pt x="4870331" y="3336995"/>
+                  </a:lnTo>
+                  <a:lnTo>
+                    <a:pt x="4798709" y="3326075"/>
+                  </a:lnTo>
+                  <a:lnTo>
+                    <a:pt x="4727086" y="3314343"/>
+                  </a:lnTo>
+                  <a:lnTo>
+                    <a:pt x="4655464" y="3301738"/>
+                  </a:lnTo>
+                  <a:lnTo>
+                    <a:pt x="4583841" y="3288195"/>
+                  </a:lnTo>
+                  <a:lnTo>
+                    <a:pt x="4512219" y="3273644"/>
+                  </a:lnTo>
+                  <a:lnTo>
+                    <a:pt x="4440596" y="3258011"/>
+                  </a:lnTo>
+                  <a:lnTo>
+                    <a:pt x="4368974" y="3241214"/>
+                  </a:lnTo>
+                  <a:lnTo>
+                    <a:pt x="4297351" y="3223168"/>
+                  </a:lnTo>
+                  <a:lnTo>
+                    <a:pt x="4225729" y="3203778"/>
+                  </a:lnTo>
+                  <a:lnTo>
+                    <a:pt x="4154106" y="3182946"/>
+                  </a:lnTo>
+                  <a:lnTo>
+                    <a:pt x="4082483" y="3160564"/>
+                  </a:lnTo>
+                  <a:lnTo>
+                    <a:pt x="4010861" y="3136516"/>
+                  </a:lnTo>
+                  <a:lnTo>
+                    <a:pt x="3939238" y="3110679"/>
+                  </a:lnTo>
+                  <a:lnTo>
+                    <a:pt x="3867616" y="3082920"/>
+                  </a:lnTo>
+                  <a:lnTo>
+                    <a:pt x="3795993" y="3053095"/>
+                  </a:lnTo>
+                  <a:lnTo>
+                    <a:pt x="3724371" y="3021051"/>
+                  </a:lnTo>
+                  <a:lnTo>
+                    <a:pt x="3652748" y="2986622"/>
+                  </a:lnTo>
+                  <a:lnTo>
+                    <a:pt x="3581126" y="2949632"/>
+                  </a:lnTo>
+                  <a:lnTo>
+                    <a:pt x="3509503" y="2909889"/>
+                  </a:lnTo>
+                  <a:lnTo>
+                    <a:pt x="3437881" y="2867189"/>
+                  </a:lnTo>
+                  <a:lnTo>
+                    <a:pt x="3366258" y="2821312"/>
+                  </a:lnTo>
+                  <a:lnTo>
+                    <a:pt x="3294636" y="2772021"/>
+                  </a:lnTo>
+                  <a:lnTo>
+                    <a:pt x="3223013" y="2719062"/>
+                  </a:lnTo>
+                  <a:lnTo>
+                    <a:pt x="3151391" y="2662163"/>
+                  </a:lnTo>
+                  <a:lnTo>
+                    <a:pt x="3079768" y="2633950"/>
+                  </a:lnTo>
+                  <a:lnTo>
+                    <a:pt x="3008146" y="2609878"/>
+                  </a:lnTo>
+                  <a:lnTo>
+                    <a:pt x="2936523" y="2585125"/>
+                  </a:lnTo>
+                  <a:lnTo>
+                    <a:pt x="2864901" y="2559670"/>
+                  </a:lnTo>
+                  <a:lnTo>
+                    <a:pt x="2793278" y="2533495"/>
+                  </a:lnTo>
+                  <a:lnTo>
+                    <a:pt x="2721655" y="2506578"/>
+                  </a:lnTo>
+                  <a:lnTo>
+                    <a:pt x="2650033" y="2478898"/>
+                  </a:lnTo>
+                  <a:lnTo>
+                    <a:pt x="2578410" y="2450434"/>
+                  </a:lnTo>
+                  <a:lnTo>
+                    <a:pt x="2506788" y="2421164"/>
+                  </a:lnTo>
+                  <a:lnTo>
+                    <a:pt x="2435165" y="2391065"/>
+                  </a:lnTo>
+                  <a:lnTo>
+                    <a:pt x="2363543" y="2360114"/>
+                  </a:lnTo>
+                  <a:lnTo>
+                    <a:pt x="2291920" y="2328285"/>
+                  </a:lnTo>
+                  <a:lnTo>
+                    <a:pt x="2220298" y="2295555"/>
+                  </a:lnTo>
+                  <a:lnTo>
+                    <a:pt x="2148675" y="2261898"/>
+                  </a:lnTo>
+                  <a:lnTo>
+                    <a:pt x="2077053" y="2227288"/>
+                  </a:lnTo>
+                  <a:lnTo>
+                    <a:pt x="2005430" y="2191697"/>
+                  </a:lnTo>
+                  <a:lnTo>
+                    <a:pt x="1933808" y="2155098"/>
+                  </a:lnTo>
+                  <a:lnTo>
+                    <a:pt x="1862185" y="2117462"/>
+                  </a:lnTo>
+                  <a:lnTo>
+                    <a:pt x="1790563" y="2078760"/>
+                  </a:lnTo>
+                  <a:lnTo>
+                    <a:pt x="1718940" y="2038962"/>
+                  </a:lnTo>
+                  <a:lnTo>
+                    <a:pt x="1647318" y="1998037"/>
+                  </a:lnTo>
+                  <a:lnTo>
+                    <a:pt x="1575695" y="1955952"/>
+                  </a:lnTo>
+                  <a:lnTo>
+                    <a:pt x="1504073" y="1912675"/>
+                  </a:lnTo>
+                  <a:lnTo>
+                    <a:pt x="1432450" y="1868173"/>
+                  </a:lnTo>
+                  <a:lnTo>
+                    <a:pt x="1360827" y="1822410"/>
+                  </a:lnTo>
+                  <a:lnTo>
+                    <a:pt x="1289205" y="1775350"/>
+                  </a:lnTo>
+                  <a:lnTo>
+                    <a:pt x="1217582" y="1726957"/>
+                  </a:lnTo>
+                  <a:lnTo>
+                    <a:pt x="1145960" y="1677194"/>
+                  </a:lnTo>
+                  <a:lnTo>
+                    <a:pt x="1074337" y="1626021"/>
+                  </a:lnTo>
+                  <a:lnTo>
+                    <a:pt x="1002715" y="1573398"/>
+                  </a:lnTo>
+                  <a:lnTo>
+                    <a:pt x="931092" y="1519285"/>
+                  </a:lnTo>
+                  <a:lnTo>
+                    <a:pt x="859470" y="1463639"/>
+                  </a:lnTo>
+                  <a:lnTo>
+                    <a:pt x="787847" y="1406417"/>
+                  </a:lnTo>
+                  <a:lnTo>
+                    <a:pt x="716225" y="1347574"/>
+                  </a:lnTo>
+                  <a:lnTo>
+                    <a:pt x="644602" y="1287064"/>
+                  </a:lnTo>
+                  <a:lnTo>
+                    <a:pt x="572980" y="1224840"/>
+                  </a:lnTo>
+                  <a:lnTo>
+                    <a:pt x="501357" y="1160854"/>
+                  </a:lnTo>
+                  <a:lnTo>
+                    <a:pt x="429735" y="1095055"/>
+                  </a:lnTo>
+                  <a:lnTo>
+                    <a:pt x="358112" y="1027392"/>
+                  </a:lnTo>
+                  <a:lnTo>
+                    <a:pt x="286490" y="957812"/>
+                  </a:lnTo>
+                  <a:lnTo>
+                    <a:pt x="214867" y="886262"/>
+                  </a:lnTo>
+                  <a:lnTo>
+                    <a:pt x="143245" y="812685"/>
+                  </a:lnTo>
+                  <a:lnTo>
+                    <a:pt x="71622" y="737023"/>
+                  </a:lnTo>
+                  <a:lnTo>
+                    <a:pt x="0" y="659219"/>
                   </a:lnTo>
                   <a:close/>
                 </a:path>
@@ -3564,243 +3564,243 @@
           </p:nvSpPr>
           <p:spPr>
             <a:xfrm>
-              <a:off x="2877575" y="2073503"/>
-              <a:ext cx="5385104" cy="3305907"/>
+              <a:off x="2882074" y="2073503"/>
+              <a:ext cx="5380604" cy="3305926"/>
             </a:xfrm>
             <a:custGeom>
               <a:avLst/>
               <a:pathLst>
-                <a:path w="5385104" h="3305907">
+                <a:path w="5380604" h="3305926">
                   <a:moveTo>
                     <a:pt x="0" y="0"/>
                   </a:moveTo>
                   <a:lnTo>
-                    <a:pt x="13414" y="47735"/>
-                  </a:lnTo>
-                  <a:lnTo>
-                    <a:pt x="85037" y="285001"/>
-                  </a:lnTo>
-                  <a:lnTo>
-                    <a:pt x="156659" y="505884"/>
-                  </a:lnTo>
-                  <a:lnTo>
-                    <a:pt x="228282" y="711514"/>
-                  </a:lnTo>
-                  <a:lnTo>
-                    <a:pt x="299904" y="902945"/>
-                  </a:lnTo>
-                  <a:lnTo>
-                    <a:pt x="371527" y="1081157"/>
-                  </a:lnTo>
-                  <a:lnTo>
-                    <a:pt x="443149" y="1247062"/>
-                  </a:lnTo>
-                  <a:lnTo>
-                    <a:pt x="514772" y="1401512"/>
-                  </a:lnTo>
-                  <a:lnTo>
-                    <a:pt x="586394" y="1545296"/>
-                  </a:lnTo>
-                  <a:lnTo>
-                    <a:pt x="658017" y="1679152"/>
-                  </a:lnTo>
-                  <a:lnTo>
-                    <a:pt x="729639" y="1803764"/>
-                  </a:lnTo>
-                  <a:lnTo>
-                    <a:pt x="801262" y="1919772"/>
-                  </a:lnTo>
-                  <a:lnTo>
-                    <a:pt x="872884" y="2027769"/>
-                  </a:lnTo>
-                  <a:lnTo>
-                    <a:pt x="944507" y="2128308"/>
-                  </a:lnTo>
-                  <a:lnTo>
-                    <a:pt x="1016129" y="2221905"/>
-                  </a:lnTo>
-                  <a:lnTo>
-                    <a:pt x="1087752" y="2309039"/>
-                  </a:lnTo>
-                  <a:lnTo>
-                    <a:pt x="1159375" y="2390156"/>
-                  </a:lnTo>
-                  <a:lnTo>
-                    <a:pt x="1230997" y="2465672"/>
-                  </a:lnTo>
-                  <a:lnTo>
-                    <a:pt x="1302620" y="2535973"/>
-                  </a:lnTo>
-                  <a:lnTo>
-                    <a:pt x="1374242" y="2601419"/>
-                  </a:lnTo>
-                  <a:lnTo>
-                    <a:pt x="1445865" y="2657440"/>
-                  </a:lnTo>
-                  <a:lnTo>
-                    <a:pt x="1517487" y="2680198"/>
-                  </a:lnTo>
-                  <a:lnTo>
-                    <a:pt x="1589110" y="2702330"/>
-                  </a:lnTo>
-                  <a:lnTo>
-                    <a:pt x="1660732" y="2723852"/>
-                  </a:lnTo>
-                  <a:lnTo>
-                    <a:pt x="1732355" y="2744781"/>
-                  </a:lnTo>
-                  <a:lnTo>
-                    <a:pt x="1803977" y="2765134"/>
-                  </a:lnTo>
-                  <a:lnTo>
-                    <a:pt x="1875600" y="2784926"/>
-                  </a:lnTo>
-                  <a:lnTo>
-                    <a:pt x="1947222" y="2804174"/>
-                  </a:lnTo>
-                  <a:lnTo>
-                    <a:pt x="2018845" y="2822891"/>
-                  </a:lnTo>
-                  <a:lnTo>
-                    <a:pt x="2090467" y="2841092"/>
-                  </a:lnTo>
-                  <a:lnTo>
-                    <a:pt x="2162090" y="2858792"/>
-                  </a:lnTo>
-                  <a:lnTo>
-                    <a:pt x="2233712" y="2876005"/>
-                  </a:lnTo>
-                  <a:lnTo>
-                    <a:pt x="2305335" y="2892744"/>
-                  </a:lnTo>
-                  <a:lnTo>
-                    <a:pt x="2376957" y="2909022"/>
-                  </a:lnTo>
-                  <a:lnTo>
-                    <a:pt x="2448580" y="2924851"/>
-                  </a:lnTo>
-                  <a:lnTo>
-                    <a:pt x="2520203" y="2940244"/>
-                  </a:lnTo>
-                  <a:lnTo>
-                    <a:pt x="2591825" y="2955214"/>
-                  </a:lnTo>
-                  <a:lnTo>
-                    <a:pt x="2663448" y="2969771"/>
-                  </a:lnTo>
-                  <a:lnTo>
-                    <a:pt x="2735070" y="2983927"/>
-                  </a:lnTo>
-                  <a:lnTo>
-                    <a:pt x="2806693" y="2997693"/>
-                  </a:lnTo>
-                  <a:lnTo>
-                    <a:pt x="2878315" y="3011080"/>
-                  </a:lnTo>
-                  <a:lnTo>
-                    <a:pt x="2949938" y="3024098"/>
-                  </a:lnTo>
-                  <a:lnTo>
-                    <a:pt x="3021560" y="3036758"/>
-                  </a:lnTo>
-                  <a:lnTo>
-                    <a:pt x="3093183" y="3049069"/>
-                  </a:lnTo>
-                  <a:lnTo>
-                    <a:pt x="3164805" y="3061041"/>
-                  </a:lnTo>
-                  <a:lnTo>
-                    <a:pt x="3236428" y="3072684"/>
-                  </a:lnTo>
-                  <a:lnTo>
-                    <a:pt x="3308050" y="3084005"/>
-                  </a:lnTo>
-                  <a:lnTo>
-                    <a:pt x="3379673" y="3095015"/>
-                  </a:lnTo>
-                  <a:lnTo>
-                    <a:pt x="3451295" y="3105722"/>
-                  </a:lnTo>
-                  <a:lnTo>
-                    <a:pt x="3522918" y="3116134"/>
-                  </a:lnTo>
-                  <a:lnTo>
-                    <a:pt x="3594540" y="3126258"/>
-                  </a:lnTo>
-                  <a:lnTo>
-                    <a:pt x="3666163" y="3136105"/>
-                  </a:lnTo>
-                  <a:lnTo>
-                    <a:pt x="3737785" y="3145679"/>
-                  </a:lnTo>
-                  <a:lnTo>
-                    <a:pt x="3809408" y="3154991"/>
-                  </a:lnTo>
-                  <a:lnTo>
-                    <a:pt x="3881031" y="3164045"/>
-                  </a:lnTo>
-                  <a:lnTo>
-                    <a:pt x="3952653" y="3172851"/>
-                  </a:lnTo>
-                  <a:lnTo>
-                    <a:pt x="4024276" y="3181413"/>
-                  </a:lnTo>
-                  <a:lnTo>
-                    <a:pt x="4095898" y="3189740"/>
-                  </a:lnTo>
-                  <a:lnTo>
-                    <a:pt x="4167521" y="3197838"/>
-                  </a:lnTo>
-                  <a:lnTo>
-                    <a:pt x="4239143" y="3205713"/>
-                  </a:lnTo>
-                  <a:lnTo>
-                    <a:pt x="4310766" y="3213370"/>
-                  </a:lnTo>
-                  <a:lnTo>
-                    <a:pt x="4382388" y="3220817"/>
-                  </a:lnTo>
-                  <a:lnTo>
-                    <a:pt x="4454011" y="3228059"/>
-                  </a:lnTo>
-                  <a:lnTo>
-                    <a:pt x="4525633" y="3235101"/>
-                  </a:lnTo>
-                  <a:lnTo>
-                    <a:pt x="4597256" y="3241949"/>
-                  </a:lnTo>
-                  <a:lnTo>
-                    <a:pt x="4668878" y="3248609"/>
-                  </a:lnTo>
-                  <a:lnTo>
-                    <a:pt x="4740501" y="3255085"/>
-                  </a:lnTo>
-                  <a:lnTo>
-                    <a:pt x="4812123" y="3261383"/>
-                  </a:lnTo>
-                  <a:lnTo>
-                    <a:pt x="4883746" y="3267508"/>
-                  </a:lnTo>
-                  <a:lnTo>
-                    <a:pt x="4955368" y="3273463"/>
-                  </a:lnTo>
-                  <a:lnTo>
-                    <a:pt x="5026991" y="3279255"/>
-                  </a:lnTo>
-                  <a:lnTo>
-                    <a:pt x="5098613" y="3284887"/>
-                  </a:lnTo>
-                  <a:lnTo>
-                    <a:pt x="5170236" y="3290364"/>
-                  </a:lnTo>
-                  <a:lnTo>
-                    <a:pt x="5241859" y="3295691"/>
-                  </a:lnTo>
-                  <a:lnTo>
-                    <a:pt x="5313481" y="3300870"/>
-                  </a:lnTo>
-                  <a:lnTo>
-                    <a:pt x="5385104" y="3305907"/>
+                    <a:pt x="8915" y="31969"/>
+                  </a:lnTo>
+                  <a:lnTo>
+                    <a:pt x="80537" y="271024"/>
+                  </a:lnTo>
+                  <a:lnTo>
+                    <a:pt x="152160" y="493523"/>
+                  </a:lnTo>
+                  <a:lnTo>
+                    <a:pt x="223782" y="700612"/>
+                  </a:lnTo>
+                  <a:lnTo>
+                    <a:pt x="295405" y="893360"/>
+                  </a:lnTo>
+                  <a:lnTo>
+                    <a:pt x="367027" y="1072759"/>
+                  </a:lnTo>
+                  <a:lnTo>
+                    <a:pt x="438650" y="1239733"/>
+                  </a:lnTo>
+                  <a:lnTo>
+                    <a:pt x="510272" y="1395143"/>
+                  </a:lnTo>
+                  <a:lnTo>
+                    <a:pt x="581895" y="1539791"/>
+                  </a:lnTo>
+                  <a:lnTo>
+                    <a:pt x="653517" y="1674420"/>
+                  </a:lnTo>
+                  <a:lnTo>
+                    <a:pt x="725140" y="1799726"/>
+                  </a:lnTo>
+                  <a:lnTo>
+                    <a:pt x="796762" y="1916354"/>
+                  </a:lnTo>
+                  <a:lnTo>
+                    <a:pt x="868385" y="2024905"/>
+                  </a:lnTo>
+                  <a:lnTo>
+                    <a:pt x="940007" y="2125938"/>
+                  </a:lnTo>
+                  <a:lnTo>
+                    <a:pt x="1011630" y="2219973"/>
+                  </a:lnTo>
+                  <a:lnTo>
+                    <a:pt x="1083252" y="2307497"/>
+                  </a:lnTo>
+                  <a:lnTo>
+                    <a:pt x="1154875" y="2388959"/>
+                  </a:lnTo>
+                  <a:lnTo>
+                    <a:pt x="1226497" y="2464779"/>
+                  </a:lnTo>
+                  <a:lnTo>
+                    <a:pt x="1298120" y="2535348"/>
+                  </a:lnTo>
+                  <a:lnTo>
+                    <a:pt x="1369743" y="2601030"/>
+                  </a:lnTo>
+                  <a:lnTo>
+                    <a:pt x="1441365" y="2657359"/>
+                  </a:lnTo>
+                  <a:lnTo>
+                    <a:pt x="1512988" y="2680122"/>
+                  </a:lnTo>
+                  <a:lnTo>
+                    <a:pt x="1584610" y="2702259"/>
+                  </a:lnTo>
+                  <a:lnTo>
+                    <a:pt x="1656233" y="2723786"/>
+                  </a:lnTo>
+                  <a:lnTo>
+                    <a:pt x="1727855" y="2744720"/>
+                  </a:lnTo>
+                  <a:lnTo>
+                    <a:pt x="1799478" y="2765077"/>
+                  </a:lnTo>
+                  <a:lnTo>
+                    <a:pt x="1871100" y="2784874"/>
+                  </a:lnTo>
+                  <a:lnTo>
+                    <a:pt x="1942723" y="2804125"/>
+                  </a:lnTo>
+                  <a:lnTo>
+                    <a:pt x="2014345" y="2822846"/>
+                  </a:lnTo>
+                  <a:lnTo>
+                    <a:pt x="2085968" y="2841051"/>
+                  </a:lnTo>
+                  <a:lnTo>
+                    <a:pt x="2157590" y="2858755"/>
+                  </a:lnTo>
+                  <a:lnTo>
+                    <a:pt x="2229213" y="2875971"/>
+                  </a:lnTo>
+                  <a:lnTo>
+                    <a:pt x="2300835" y="2892712"/>
+                  </a:lnTo>
+                  <a:lnTo>
+                    <a:pt x="2372458" y="2908993"/>
+                  </a:lnTo>
+                  <a:lnTo>
+                    <a:pt x="2444080" y="2924825"/>
+                  </a:lnTo>
+                  <a:lnTo>
+                    <a:pt x="2515703" y="2940221"/>
+                  </a:lnTo>
+                  <a:lnTo>
+                    <a:pt x="2587325" y="2955193"/>
+                  </a:lnTo>
+                  <a:lnTo>
+                    <a:pt x="2658948" y="2969753"/>
+                  </a:lnTo>
+                  <a:lnTo>
+                    <a:pt x="2730570" y="2983911"/>
+                  </a:lnTo>
+                  <a:lnTo>
+                    <a:pt x="2802193" y="2997680"/>
+                  </a:lnTo>
+                  <a:lnTo>
+                    <a:pt x="2873816" y="3011069"/>
+                  </a:lnTo>
+                  <a:lnTo>
+                    <a:pt x="2945438" y="3024089"/>
+                  </a:lnTo>
+                  <a:lnTo>
+                    <a:pt x="3017061" y="3036751"/>
+                  </a:lnTo>
+                  <a:lnTo>
+                    <a:pt x="3088683" y="3049064"/>
+                  </a:lnTo>
+                  <a:lnTo>
+                    <a:pt x="3160306" y="3061038"/>
+                  </a:lnTo>
+                  <a:lnTo>
+                    <a:pt x="3231928" y="3072682"/>
+                  </a:lnTo>
+                  <a:lnTo>
+                    <a:pt x="3303551" y="3084005"/>
+                  </a:lnTo>
+                  <a:lnTo>
+                    <a:pt x="3375173" y="3095016"/>
+                  </a:lnTo>
+                  <a:lnTo>
+                    <a:pt x="3446796" y="3105724"/>
+                  </a:lnTo>
+                  <a:lnTo>
+                    <a:pt x="3518418" y="3116137"/>
+                  </a:lnTo>
+                  <a:lnTo>
+                    <a:pt x="3590041" y="3126263"/>
+                  </a:lnTo>
+                  <a:lnTo>
+                    <a:pt x="3661663" y="3136111"/>
+                  </a:lnTo>
+                  <a:lnTo>
+                    <a:pt x="3733286" y="3145687"/>
+                  </a:lnTo>
+                  <a:lnTo>
+                    <a:pt x="3804908" y="3154999"/>
+                  </a:lnTo>
+                  <a:lnTo>
+                    <a:pt x="3876531" y="3164055"/>
+                  </a:lnTo>
+                  <a:lnTo>
+                    <a:pt x="3948153" y="3172861"/>
+                  </a:lnTo>
+                  <a:lnTo>
+                    <a:pt x="4019776" y="3181425"/>
+                  </a:lnTo>
+                  <a:lnTo>
+                    <a:pt x="4091398" y="3189752"/>
+                  </a:lnTo>
+                  <a:lnTo>
+                    <a:pt x="4163021" y="3197851"/>
+                  </a:lnTo>
+                  <a:lnTo>
+                    <a:pt x="4234644" y="3205726"/>
+                  </a:lnTo>
+                  <a:lnTo>
+                    <a:pt x="4306266" y="3213384"/>
+                  </a:lnTo>
+                  <a:lnTo>
+                    <a:pt x="4377889" y="3220832"/>
+                  </a:lnTo>
+                  <a:lnTo>
+                    <a:pt x="4449511" y="3228074"/>
+                  </a:lnTo>
+                  <a:lnTo>
+                    <a:pt x="4521134" y="3235117"/>
+                  </a:lnTo>
+                  <a:lnTo>
+                    <a:pt x="4592756" y="3241966"/>
+                  </a:lnTo>
+                  <a:lnTo>
+                    <a:pt x="4664379" y="3248626"/>
+                  </a:lnTo>
+                  <a:lnTo>
+                    <a:pt x="4736001" y="3255102"/>
+                  </a:lnTo>
+                  <a:lnTo>
+                    <a:pt x="4807624" y="3261401"/>
+                  </a:lnTo>
+                  <a:lnTo>
+                    <a:pt x="4879246" y="3267525"/>
+                  </a:lnTo>
+                  <a:lnTo>
+                    <a:pt x="4950869" y="3273481"/>
+                  </a:lnTo>
+                  <a:lnTo>
+                    <a:pt x="5022491" y="3279273"/>
+                  </a:lnTo>
+                  <a:lnTo>
+                    <a:pt x="5094114" y="3284906"/>
+                  </a:lnTo>
+                  <a:lnTo>
+                    <a:pt x="5165736" y="3290383"/>
+                  </a:lnTo>
+                  <a:lnTo>
+                    <a:pt x="5237359" y="3295709"/>
+                  </a:lnTo>
+                  <a:lnTo>
+                    <a:pt x="5308981" y="3300889"/>
+                  </a:lnTo>
+                  <a:lnTo>
+                    <a:pt x="5380604" y="3305926"/>
                   </a:lnTo>
                 </a:path>
               </a:pathLst>
@@ -3820,309 +3820,309 @@
           </p:nvSpPr>
           <p:spPr>
             <a:xfrm>
-              <a:off x="1172049" y="2733463"/>
-              <a:ext cx="7090630" cy="2807737"/>
+              <a:off x="1172049" y="2732722"/>
+              <a:ext cx="7090630" cy="2808666"/>
             </a:xfrm>
             <a:custGeom>
               <a:avLst/>
               <a:pathLst>
-                <a:path w="7090630" h="2807737">
+                <a:path w="7090630" h="2808666">
                   <a:moveTo>
-                    <a:pt x="7090630" y="2807737"/>
+                    <a:pt x="7090630" y="2808666"/>
                   </a:moveTo>
                   <a:lnTo>
-                    <a:pt x="7019007" y="2806547"/>
-                  </a:lnTo>
-                  <a:lnTo>
-                    <a:pt x="6947385" y="2805268"/>
-                  </a:lnTo>
-                  <a:lnTo>
-                    <a:pt x="6875762" y="2803895"/>
-                  </a:lnTo>
-                  <a:lnTo>
-                    <a:pt x="6804139" y="2802419"/>
-                  </a:lnTo>
-                  <a:lnTo>
-                    <a:pt x="6732517" y="2800834"/>
-                  </a:lnTo>
-                  <a:lnTo>
-                    <a:pt x="6660894" y="2799132"/>
-                  </a:lnTo>
-                  <a:lnTo>
-                    <a:pt x="6589272" y="2797303"/>
-                  </a:lnTo>
-                  <a:lnTo>
-                    <a:pt x="6517649" y="2795339"/>
-                  </a:lnTo>
-                  <a:lnTo>
-                    <a:pt x="6446027" y="2793229"/>
-                  </a:lnTo>
-                  <a:lnTo>
-                    <a:pt x="6374404" y="2790962"/>
-                  </a:lnTo>
-                  <a:lnTo>
-                    <a:pt x="6302782" y="2788528"/>
-                  </a:lnTo>
-                  <a:lnTo>
-                    <a:pt x="6231159" y="2785912"/>
-                  </a:lnTo>
-                  <a:lnTo>
-                    <a:pt x="6159537" y="2783103"/>
-                  </a:lnTo>
-                  <a:lnTo>
-                    <a:pt x="6087914" y="2780086"/>
-                  </a:lnTo>
-                  <a:lnTo>
-                    <a:pt x="6016292" y="2776844"/>
-                  </a:lnTo>
-                  <a:lnTo>
-                    <a:pt x="5944669" y="2773362"/>
-                  </a:lnTo>
-                  <a:lnTo>
-                    <a:pt x="5873047" y="2769622"/>
-                  </a:lnTo>
-                  <a:lnTo>
-                    <a:pt x="5801424" y="2765605"/>
-                  </a:lnTo>
-                  <a:lnTo>
-                    <a:pt x="5729802" y="2761289"/>
-                  </a:lnTo>
-                  <a:lnTo>
-                    <a:pt x="5658179" y="2756653"/>
-                  </a:lnTo>
-                  <a:lnTo>
-                    <a:pt x="5586557" y="2751674"/>
-                  </a:lnTo>
-                  <a:lnTo>
-                    <a:pt x="5514934" y="2746325"/>
-                  </a:lnTo>
-                  <a:lnTo>
-                    <a:pt x="5443311" y="2740579"/>
-                  </a:lnTo>
-                  <a:lnTo>
-                    <a:pt x="5371689" y="2734408"/>
-                  </a:lnTo>
-                  <a:lnTo>
-                    <a:pt x="5300066" y="2727778"/>
-                  </a:lnTo>
-                  <a:lnTo>
-                    <a:pt x="5228444" y="2720657"/>
-                  </a:lnTo>
-                  <a:lnTo>
-                    <a:pt x="5156821" y="2713007"/>
-                  </a:lnTo>
-                  <a:lnTo>
-                    <a:pt x="5085199" y="2704790"/>
-                  </a:lnTo>
-                  <a:lnTo>
-                    <a:pt x="5013576" y="2695964"/>
-                  </a:lnTo>
-                  <a:lnTo>
-                    <a:pt x="4941954" y="2686483"/>
-                  </a:lnTo>
-                  <a:lnTo>
-                    <a:pt x="4870331" y="2676298"/>
-                  </a:lnTo>
-                  <a:lnTo>
-                    <a:pt x="4798709" y="2665358"/>
-                  </a:lnTo>
-                  <a:lnTo>
-                    <a:pt x="4727086" y="2653607"/>
-                  </a:lnTo>
-                  <a:lnTo>
-                    <a:pt x="4655464" y="2640984"/>
-                  </a:lnTo>
-                  <a:lnTo>
-                    <a:pt x="4583841" y="2627425"/>
-                  </a:lnTo>
-                  <a:lnTo>
-                    <a:pt x="4512219" y="2612860"/>
-                  </a:lnTo>
-                  <a:lnTo>
-                    <a:pt x="4440596" y="2597214"/>
-                  </a:lnTo>
-                  <a:lnTo>
-                    <a:pt x="4368974" y="2580408"/>
-                  </a:lnTo>
-                  <a:lnTo>
-                    <a:pt x="4297351" y="2562356"/>
-                  </a:lnTo>
-                  <a:lnTo>
-                    <a:pt x="4225729" y="2542964"/>
-                  </a:lnTo>
-                  <a:lnTo>
-                    <a:pt x="4154106" y="2522135"/>
-                  </a:lnTo>
-                  <a:lnTo>
-                    <a:pt x="4082483" y="2499760"/>
-                  </a:lnTo>
-                  <a:lnTo>
-                    <a:pt x="4010861" y="2475725"/>
-                  </a:lnTo>
-                  <a:lnTo>
-                    <a:pt x="3939238" y="2449908"/>
-                  </a:lnTo>
-                  <a:lnTo>
-                    <a:pt x="3867616" y="2422175"/>
-                  </a:lnTo>
-                  <a:lnTo>
-                    <a:pt x="3795993" y="2392386"/>
-                  </a:lnTo>
-                  <a:lnTo>
-                    <a:pt x="3724371" y="2360387"/>
-                  </a:lnTo>
-                  <a:lnTo>
-                    <a:pt x="3652748" y="2326014"/>
-                  </a:lnTo>
-                  <a:lnTo>
-                    <a:pt x="3581126" y="2289092"/>
-                  </a:lnTo>
-                  <a:lnTo>
-                    <a:pt x="3509503" y="2249431"/>
-                  </a:lnTo>
-                  <a:lnTo>
-                    <a:pt x="3437881" y="2206829"/>
-                  </a:lnTo>
-                  <a:lnTo>
-                    <a:pt x="3366258" y="2161066"/>
-                  </a:lnTo>
-                  <a:lnTo>
-                    <a:pt x="3294636" y="2111909"/>
-                  </a:lnTo>
-                  <a:lnTo>
-                    <a:pt x="3223013" y="2059106"/>
-                  </a:lnTo>
-                  <a:lnTo>
-                    <a:pt x="3151391" y="2002386"/>
-                  </a:lnTo>
-                  <a:lnTo>
-                    <a:pt x="3079768" y="1974076"/>
-                  </a:lnTo>
-                  <a:lnTo>
-                    <a:pt x="3008146" y="1950010"/>
-                  </a:lnTo>
-                  <a:lnTo>
-                    <a:pt x="2936523" y="1925262"/>
-                  </a:lnTo>
-                  <a:lnTo>
-                    <a:pt x="2864901" y="1899814"/>
-                  </a:lnTo>
-                  <a:lnTo>
-                    <a:pt x="2793278" y="1873645"/>
-                  </a:lnTo>
-                  <a:lnTo>
-                    <a:pt x="2721655" y="1846734"/>
-                  </a:lnTo>
-                  <a:lnTo>
-                    <a:pt x="2650033" y="1819062"/>
-                  </a:lnTo>
-                  <a:lnTo>
-                    <a:pt x="2578410" y="1790606"/>
-                  </a:lnTo>
-                  <a:lnTo>
-                    <a:pt x="2506788" y="1761343"/>
-                  </a:lnTo>
-                  <a:lnTo>
-                    <a:pt x="2435165" y="1731252"/>
-                  </a:lnTo>
-                  <a:lnTo>
-                    <a:pt x="2363543" y="1700309"/>
-                  </a:lnTo>
-                  <a:lnTo>
-                    <a:pt x="2291920" y="1668490"/>
-                  </a:lnTo>
-                  <a:lnTo>
-                    <a:pt x="2220298" y="1635769"/>
-                  </a:lnTo>
-                  <a:lnTo>
-                    <a:pt x="2148675" y="1602121"/>
-                  </a:lnTo>
-                  <a:lnTo>
-                    <a:pt x="2077053" y="1567521"/>
-                  </a:lnTo>
-                  <a:lnTo>
-                    <a:pt x="2005430" y="1531940"/>
-                  </a:lnTo>
-                  <a:lnTo>
-                    <a:pt x="1933808" y="1495352"/>
-                  </a:lnTo>
-                  <a:lnTo>
-                    <a:pt x="1862185" y="1457727"/>
-                  </a:lnTo>
-                  <a:lnTo>
-                    <a:pt x="1790563" y="1419037"/>
-                  </a:lnTo>
-                  <a:lnTo>
-                    <a:pt x="1718940" y="1379251"/>
-                  </a:lnTo>
-                  <a:lnTo>
-                    <a:pt x="1647318" y="1338338"/>
-                  </a:lnTo>
-                  <a:lnTo>
-                    <a:pt x="1575695" y="1296267"/>
-                  </a:lnTo>
-                  <a:lnTo>
-                    <a:pt x="1504073" y="1253004"/>
-                  </a:lnTo>
-                  <a:lnTo>
-                    <a:pt x="1432450" y="1208515"/>
-                  </a:lnTo>
-                  <a:lnTo>
-                    <a:pt x="1360827" y="1162767"/>
-                  </a:lnTo>
-                  <a:lnTo>
-                    <a:pt x="1289205" y="1115723"/>
-                  </a:lnTo>
-                  <a:lnTo>
-                    <a:pt x="1217582" y="1067346"/>
-                  </a:lnTo>
-                  <a:lnTo>
-                    <a:pt x="1145960" y="1017599"/>
-                  </a:lnTo>
-                  <a:lnTo>
-                    <a:pt x="1074337" y="966444"/>
-                  </a:lnTo>
-                  <a:lnTo>
-                    <a:pt x="1002715" y="913839"/>
-                  </a:lnTo>
-                  <a:lnTo>
-                    <a:pt x="931092" y="859745"/>
-                  </a:lnTo>
-                  <a:lnTo>
-                    <a:pt x="859470" y="804118"/>
-                  </a:lnTo>
-                  <a:lnTo>
-                    <a:pt x="787847" y="746916"/>
-                  </a:lnTo>
-                  <a:lnTo>
-                    <a:pt x="716225" y="688094"/>
-                  </a:lnTo>
-                  <a:lnTo>
-                    <a:pt x="644602" y="627606"/>
-                  </a:lnTo>
-                  <a:lnTo>
-                    <a:pt x="572980" y="565405"/>
-                  </a:lnTo>
-                  <a:lnTo>
-                    <a:pt x="501357" y="501442"/>
-                  </a:lnTo>
-                  <a:lnTo>
-                    <a:pt x="429735" y="435667"/>
-                  </a:lnTo>
-                  <a:lnTo>
-                    <a:pt x="358112" y="368030"/>
-                  </a:lnTo>
-                  <a:lnTo>
-                    <a:pt x="286490" y="298477"/>
-                  </a:lnTo>
-                  <a:lnTo>
-                    <a:pt x="214867" y="226954"/>
-                  </a:lnTo>
-                  <a:lnTo>
-                    <a:pt x="143245" y="153405"/>
-                  </a:lnTo>
-                  <a:lnTo>
-                    <a:pt x="71622" y="77773"/>
+                    <a:pt x="7019007" y="2807486"/>
+                  </a:lnTo>
+                  <a:lnTo>
+                    <a:pt x="6947385" y="2806218"/>
+                  </a:lnTo>
+                  <a:lnTo>
+                    <a:pt x="6875762" y="2804856"/>
+                  </a:lnTo>
+                  <a:lnTo>
+                    <a:pt x="6804139" y="2803392"/>
+                  </a:lnTo>
+                  <a:lnTo>
+                    <a:pt x="6732517" y="2801819"/>
+                  </a:lnTo>
+                  <a:lnTo>
+                    <a:pt x="6660894" y="2800130"/>
+                  </a:lnTo>
+                  <a:lnTo>
+                    <a:pt x="6589272" y="2798314"/>
+                  </a:lnTo>
+                  <a:lnTo>
+                    <a:pt x="6517649" y="2796364"/>
+                  </a:lnTo>
+                  <a:lnTo>
+                    <a:pt x="6446027" y="2794268"/>
+                  </a:lnTo>
+                  <a:lnTo>
+                    <a:pt x="6374404" y="2792017"/>
+                  </a:lnTo>
+                  <a:lnTo>
+                    <a:pt x="6302782" y="2789598"/>
+                  </a:lnTo>
+                  <a:lnTo>
+                    <a:pt x="6231159" y="2786999"/>
+                  </a:lnTo>
+                  <a:lnTo>
+                    <a:pt x="6159537" y="2784206"/>
+                  </a:lnTo>
+                  <a:lnTo>
+                    <a:pt x="6087914" y="2781206"/>
+                  </a:lnTo>
+                  <a:lnTo>
+                    <a:pt x="6016292" y="2777982"/>
+                  </a:lnTo>
+                  <a:lnTo>
+                    <a:pt x="5944669" y="2774519"/>
+                  </a:lnTo>
+                  <a:lnTo>
+                    <a:pt x="5873047" y="2770798"/>
+                  </a:lnTo>
+                  <a:lnTo>
+                    <a:pt x="5801424" y="2766800"/>
+                  </a:lnTo>
+                  <a:lnTo>
+                    <a:pt x="5729802" y="2762505"/>
+                  </a:lnTo>
+                  <a:lnTo>
+                    <a:pt x="5658179" y="2757890"/>
+                  </a:lnTo>
+                  <a:lnTo>
+                    <a:pt x="5586557" y="2752931"/>
+                  </a:lnTo>
+                  <a:lnTo>
+                    <a:pt x="5514934" y="2747604"/>
+                  </a:lnTo>
+                  <a:lnTo>
+                    <a:pt x="5443311" y="2741880"/>
+                  </a:lnTo>
+                  <a:lnTo>
+                    <a:pt x="5371689" y="2735731"/>
+                  </a:lnTo>
+                  <a:lnTo>
+                    <a:pt x="5300066" y="2729123"/>
+                  </a:lnTo>
+                  <a:lnTo>
+                    <a:pt x="5228444" y="2722024"/>
+                  </a:lnTo>
+                  <a:lnTo>
+                    <a:pt x="5156821" y="2714397"/>
+                  </a:lnTo>
+                  <a:lnTo>
+                    <a:pt x="5085199" y="2706203"/>
+                  </a:lnTo>
+                  <a:lnTo>
+                    <a:pt x="5013576" y="2697398"/>
+                  </a:lnTo>
+                  <a:lnTo>
+                    <a:pt x="4941954" y="2687939"/>
+                  </a:lnTo>
+                  <a:lnTo>
+                    <a:pt x="4870331" y="2677775"/>
+                  </a:lnTo>
+                  <a:lnTo>
+                    <a:pt x="4798709" y="2666856"/>
+                  </a:lnTo>
+                  <a:lnTo>
+                    <a:pt x="4727086" y="2655124"/>
+                  </a:lnTo>
+                  <a:lnTo>
+                    <a:pt x="4655464" y="2642519"/>
+                  </a:lnTo>
+                  <a:lnTo>
+                    <a:pt x="4583841" y="2628976"/>
+                  </a:lnTo>
+                  <a:lnTo>
+                    <a:pt x="4512219" y="2614425"/>
+                  </a:lnTo>
+                  <a:lnTo>
+                    <a:pt x="4440596" y="2598791"/>
+                  </a:lnTo>
+                  <a:lnTo>
+                    <a:pt x="4368974" y="2581995"/>
+                  </a:lnTo>
+                  <a:lnTo>
+                    <a:pt x="4297351" y="2563948"/>
+                  </a:lnTo>
+                  <a:lnTo>
+                    <a:pt x="4225729" y="2544559"/>
+                  </a:lnTo>
+                  <a:lnTo>
+                    <a:pt x="4154106" y="2523727"/>
+                  </a:lnTo>
+                  <a:lnTo>
+                    <a:pt x="4082483" y="2501345"/>
+                  </a:lnTo>
+                  <a:lnTo>
+                    <a:pt x="4010861" y="2477297"/>
+                  </a:lnTo>
+                  <a:lnTo>
+                    <a:pt x="3939238" y="2451460"/>
+                  </a:lnTo>
+                  <a:lnTo>
+                    <a:pt x="3867616" y="2423701"/>
+                  </a:lnTo>
+                  <a:lnTo>
+                    <a:pt x="3795993" y="2393876"/>
+                  </a:lnTo>
+                  <a:lnTo>
+                    <a:pt x="3724371" y="2361831"/>
+                  </a:lnTo>
+                  <a:lnTo>
+                    <a:pt x="3652748" y="2327403"/>
+                  </a:lnTo>
+                  <a:lnTo>
+                    <a:pt x="3581126" y="2290412"/>
+                  </a:lnTo>
+                  <a:lnTo>
+                    <a:pt x="3509503" y="2250670"/>
+                  </a:lnTo>
+                  <a:lnTo>
+                    <a:pt x="3437881" y="2207970"/>
+                  </a:lnTo>
+                  <a:lnTo>
+                    <a:pt x="3366258" y="2162092"/>
+                  </a:lnTo>
+                  <a:lnTo>
+                    <a:pt x="3294636" y="2112801"/>
+                  </a:lnTo>
+                  <a:lnTo>
+                    <a:pt x="3223013" y="2059843"/>
+                  </a:lnTo>
+                  <a:lnTo>
+                    <a:pt x="3151391" y="2002943"/>
+                  </a:lnTo>
+                  <a:lnTo>
+                    <a:pt x="3079768" y="1974731"/>
+                  </a:lnTo>
+                  <a:lnTo>
+                    <a:pt x="3008146" y="1950659"/>
+                  </a:lnTo>
+                  <a:lnTo>
+                    <a:pt x="2936523" y="1925906"/>
+                  </a:lnTo>
+                  <a:lnTo>
+                    <a:pt x="2864901" y="1900451"/>
+                  </a:lnTo>
+                  <a:lnTo>
+                    <a:pt x="2793278" y="1874275"/>
+                  </a:lnTo>
+                  <a:lnTo>
+                    <a:pt x="2721655" y="1847358"/>
+                  </a:lnTo>
+                  <a:lnTo>
+                    <a:pt x="2650033" y="1819679"/>
+                  </a:lnTo>
+                  <a:lnTo>
+                    <a:pt x="2578410" y="1791215"/>
+                  </a:lnTo>
+                  <a:lnTo>
+                    <a:pt x="2506788" y="1761945"/>
+                  </a:lnTo>
+                  <a:lnTo>
+                    <a:pt x="2435165" y="1731846"/>
+                  </a:lnTo>
+                  <a:lnTo>
+                    <a:pt x="2363543" y="1700894"/>
+                  </a:lnTo>
+                  <a:lnTo>
+                    <a:pt x="2291920" y="1669066"/>
+                  </a:lnTo>
+                  <a:lnTo>
+                    <a:pt x="2220298" y="1636336"/>
+                  </a:lnTo>
+                  <a:lnTo>
+                    <a:pt x="2148675" y="1602679"/>
+                  </a:lnTo>
+                  <a:lnTo>
+                    <a:pt x="2077053" y="1568068"/>
+                  </a:lnTo>
+                  <a:lnTo>
+                    <a:pt x="2005430" y="1532478"/>
+                  </a:lnTo>
+                  <a:lnTo>
+                    <a:pt x="1933808" y="1495879"/>
+                  </a:lnTo>
+                  <a:lnTo>
+                    <a:pt x="1862185" y="1458243"/>
+                  </a:lnTo>
+                  <a:lnTo>
+                    <a:pt x="1790563" y="1419541"/>
+                  </a:lnTo>
+                  <a:lnTo>
+                    <a:pt x="1718940" y="1379743"/>
+                  </a:lnTo>
+                  <a:lnTo>
+                    <a:pt x="1647318" y="1338818"/>
+                  </a:lnTo>
+                  <a:lnTo>
+                    <a:pt x="1575695" y="1296733"/>
+                  </a:lnTo>
+                  <a:lnTo>
+                    <a:pt x="1504073" y="1253456"/>
+                  </a:lnTo>
+                  <a:lnTo>
+                    <a:pt x="1432450" y="1208953"/>
+                  </a:lnTo>
+                  <a:lnTo>
+                    <a:pt x="1360827" y="1163190"/>
+                  </a:lnTo>
+                  <a:lnTo>
+                    <a:pt x="1289205" y="1116131"/>
+                  </a:lnTo>
+                  <a:lnTo>
+                    <a:pt x="1217582" y="1067738"/>
+                  </a:lnTo>
+                  <a:lnTo>
+                    <a:pt x="1145960" y="1017975"/>
+                  </a:lnTo>
+                  <a:lnTo>
+                    <a:pt x="1074337" y="966802"/>
+                  </a:lnTo>
+                  <a:lnTo>
+                    <a:pt x="1002715" y="914179"/>
+                  </a:lnTo>
+                  <a:lnTo>
+                    <a:pt x="931092" y="860066"/>
+                  </a:lnTo>
+                  <a:lnTo>
+                    <a:pt x="859470" y="804420"/>
+                  </a:lnTo>
+                  <a:lnTo>
+                    <a:pt x="787847" y="747198"/>
+                  </a:lnTo>
+                  <a:lnTo>
+                    <a:pt x="716225" y="688355"/>
+                  </a:lnTo>
+                  <a:lnTo>
+                    <a:pt x="644602" y="627845"/>
+                  </a:lnTo>
+                  <a:lnTo>
+                    <a:pt x="572980" y="565621"/>
+                  </a:lnTo>
+                  <a:lnTo>
+                    <a:pt x="501357" y="501634"/>
+                  </a:lnTo>
+                  <a:lnTo>
+                    <a:pt x="429735" y="435835"/>
+                  </a:lnTo>
+                  <a:lnTo>
+                    <a:pt x="358112" y="368172"/>
+                  </a:lnTo>
+                  <a:lnTo>
+                    <a:pt x="286490" y="298593"/>
+                  </a:lnTo>
+                  <a:lnTo>
+                    <a:pt x="214867" y="227043"/>
+                  </a:lnTo>
+                  <a:lnTo>
+                    <a:pt x="143245" y="153465"/>
+                  </a:lnTo>
+                  <a:lnTo>
+                    <a:pt x="71622" y="77804"/>
                   </a:lnTo>
                   <a:lnTo>
                     <a:pt x="0" y="0"/>
@@ -4145,267 +4145,267 @@
           </p:nvSpPr>
           <p:spPr>
             <a:xfrm>
-              <a:off x="2247284" y="2073503"/>
-              <a:ext cx="6015394" cy="3430323"/>
+              <a:off x="2252237" y="2073503"/>
+              <a:ext cx="6010441" cy="3430639"/>
             </a:xfrm>
             <a:custGeom>
               <a:avLst/>
               <a:pathLst>
-                <a:path w="6015394" h="3430323">
+                <a:path w="6010441" h="3430639">
                   <a:moveTo>
                     <a:pt x="0" y="0"/>
                   </a:moveTo>
                   <a:lnTo>
-                    <a:pt x="70725" y="167028"/>
-                  </a:lnTo>
-                  <a:lnTo>
-                    <a:pt x="142347" y="327969"/>
-                  </a:lnTo>
-                  <a:lnTo>
-                    <a:pt x="213970" y="481100"/>
-                  </a:lnTo>
-                  <a:lnTo>
-                    <a:pt x="285592" y="626800"/>
-                  </a:lnTo>
-                  <a:lnTo>
-                    <a:pt x="357215" y="765431"/>
-                  </a:lnTo>
-                  <a:lnTo>
-                    <a:pt x="428837" y="897334"/>
-                  </a:lnTo>
-                  <a:lnTo>
-                    <a:pt x="500460" y="1022837"/>
-                  </a:lnTo>
-                  <a:lnTo>
-                    <a:pt x="572082" y="1142250"/>
-                  </a:lnTo>
-                  <a:lnTo>
-                    <a:pt x="643705" y="1255869"/>
-                  </a:lnTo>
-                  <a:lnTo>
-                    <a:pt x="715327" y="1363975"/>
-                  </a:lnTo>
-                  <a:lnTo>
-                    <a:pt x="786950" y="1466835"/>
-                  </a:lnTo>
-                  <a:lnTo>
-                    <a:pt x="858572" y="1564703"/>
-                  </a:lnTo>
-                  <a:lnTo>
-                    <a:pt x="930195" y="1657823"/>
-                  </a:lnTo>
-                  <a:lnTo>
-                    <a:pt x="1001817" y="1746424"/>
-                  </a:lnTo>
-                  <a:lnTo>
-                    <a:pt x="1073440" y="1830726"/>
-                  </a:lnTo>
-                  <a:lnTo>
-                    <a:pt x="1145062" y="1910937"/>
-                  </a:lnTo>
-                  <a:lnTo>
-                    <a:pt x="1216685" y="1987256"/>
-                  </a:lnTo>
-                  <a:lnTo>
-                    <a:pt x="1288308" y="2059872"/>
-                  </a:lnTo>
-                  <a:lnTo>
-                    <a:pt x="1359930" y="2128964"/>
-                  </a:lnTo>
-                  <a:lnTo>
-                    <a:pt x="1431553" y="2194703"/>
-                  </a:lnTo>
-                  <a:lnTo>
-                    <a:pt x="1503175" y="2257253"/>
-                  </a:lnTo>
-                  <a:lnTo>
-                    <a:pt x="1574798" y="2316767"/>
-                  </a:lnTo>
-                  <a:lnTo>
-                    <a:pt x="1646420" y="2373394"/>
-                  </a:lnTo>
-                  <a:lnTo>
-                    <a:pt x="1718043" y="2427272"/>
-                  </a:lnTo>
-                  <a:lnTo>
-                    <a:pt x="1789665" y="2478537"/>
-                  </a:lnTo>
-                  <a:lnTo>
-                    <a:pt x="1861288" y="2527314"/>
-                  </a:lnTo>
-                  <a:lnTo>
-                    <a:pt x="1932910" y="2573724"/>
-                  </a:lnTo>
-                  <a:lnTo>
-                    <a:pt x="2004533" y="2617882"/>
-                  </a:lnTo>
-                  <a:lnTo>
-                    <a:pt x="2076155" y="2659897"/>
-                  </a:lnTo>
-                  <a:lnTo>
-                    <a:pt x="2147778" y="2699873"/>
-                  </a:lnTo>
-                  <a:lnTo>
-                    <a:pt x="2219400" y="2737910"/>
-                  </a:lnTo>
-                  <a:lnTo>
-                    <a:pt x="2291023" y="2774101"/>
-                  </a:lnTo>
-                  <a:lnTo>
-                    <a:pt x="2362645" y="2808536"/>
-                  </a:lnTo>
-                  <a:lnTo>
-                    <a:pt x="2434268" y="2841300"/>
-                  </a:lnTo>
-                  <a:lnTo>
-                    <a:pt x="2505890" y="2872474"/>
-                  </a:lnTo>
-                  <a:lnTo>
-                    <a:pt x="2577513" y="2902135"/>
-                  </a:lnTo>
-                  <a:lnTo>
-                    <a:pt x="2649136" y="2930357"/>
-                  </a:lnTo>
-                  <a:lnTo>
-                    <a:pt x="2720758" y="2957210"/>
-                  </a:lnTo>
-                  <a:lnTo>
-                    <a:pt x="2792381" y="2982760"/>
-                  </a:lnTo>
-                  <a:lnTo>
-                    <a:pt x="2864003" y="3007069"/>
-                  </a:lnTo>
-                  <a:lnTo>
-                    <a:pt x="2935626" y="3030200"/>
-                  </a:lnTo>
-                  <a:lnTo>
-                    <a:pt x="3007248" y="3052208"/>
-                  </a:lnTo>
-                  <a:lnTo>
-                    <a:pt x="3078871" y="3073148"/>
-                  </a:lnTo>
-                  <a:lnTo>
-                    <a:pt x="3150493" y="3093072"/>
-                  </a:lnTo>
-                  <a:lnTo>
-                    <a:pt x="3222116" y="3112029"/>
-                  </a:lnTo>
-                  <a:lnTo>
-                    <a:pt x="3293738" y="3130066"/>
-                  </a:lnTo>
-                  <a:lnTo>
-                    <a:pt x="3365361" y="3147228"/>
-                  </a:lnTo>
-                  <a:lnTo>
-                    <a:pt x="3436983" y="3163557"/>
-                  </a:lnTo>
-                  <a:lnTo>
-                    <a:pt x="3508606" y="3179094"/>
-                  </a:lnTo>
-                  <a:lnTo>
-                    <a:pt x="3580228" y="3193877"/>
-                  </a:lnTo>
-                  <a:lnTo>
-                    <a:pt x="3651851" y="3207943"/>
-                  </a:lnTo>
-                  <a:lnTo>
-                    <a:pt x="3723473" y="3221326"/>
-                  </a:lnTo>
-                  <a:lnTo>
-                    <a:pt x="3795096" y="3234059"/>
-                  </a:lnTo>
-                  <a:lnTo>
-                    <a:pt x="3866718" y="3246175"/>
-                  </a:lnTo>
-                  <a:lnTo>
-                    <a:pt x="3938341" y="3257703"/>
-                  </a:lnTo>
-                  <a:lnTo>
-                    <a:pt x="4009964" y="3268672"/>
-                  </a:lnTo>
-                  <a:lnTo>
-                    <a:pt x="4081586" y="3279108"/>
-                  </a:lnTo>
-                  <a:lnTo>
-                    <a:pt x="4153209" y="3289038"/>
-                  </a:lnTo>
-                  <a:lnTo>
-                    <a:pt x="4224831" y="3298486"/>
-                  </a:lnTo>
-                  <a:lnTo>
-                    <a:pt x="4296454" y="3307475"/>
-                  </a:lnTo>
-                  <a:lnTo>
-                    <a:pt x="4368076" y="3316029"/>
-                  </a:lnTo>
-                  <a:lnTo>
-                    <a:pt x="4439699" y="3324167"/>
-                  </a:lnTo>
-                  <a:lnTo>
-                    <a:pt x="4511321" y="3331911"/>
-                  </a:lnTo>
-                  <a:lnTo>
-                    <a:pt x="4582944" y="3339278"/>
-                  </a:lnTo>
-                  <a:lnTo>
-                    <a:pt x="4654566" y="3346288"/>
-                  </a:lnTo>
-                  <a:lnTo>
-                    <a:pt x="4726189" y="3352958"/>
-                  </a:lnTo>
-                  <a:lnTo>
-                    <a:pt x="4797811" y="3359305"/>
-                  </a:lnTo>
-                  <a:lnTo>
-                    <a:pt x="4869434" y="3365343"/>
-                  </a:lnTo>
-                  <a:lnTo>
-                    <a:pt x="4941056" y="3371089"/>
-                  </a:lnTo>
-                  <a:lnTo>
-                    <a:pt x="5012679" y="3376555"/>
-                  </a:lnTo>
-                  <a:lnTo>
-                    <a:pt x="5084301" y="3381757"/>
-                  </a:lnTo>
-                  <a:lnTo>
-                    <a:pt x="5155924" y="3386705"/>
-                  </a:lnTo>
-                  <a:lnTo>
-                    <a:pt x="5227546" y="3391414"/>
-                  </a:lnTo>
-                  <a:lnTo>
-                    <a:pt x="5299169" y="3395895"/>
-                  </a:lnTo>
-                  <a:lnTo>
-                    <a:pt x="5370792" y="3400158"/>
-                  </a:lnTo>
-                  <a:lnTo>
-                    <a:pt x="5442414" y="3404214"/>
-                  </a:lnTo>
-                  <a:lnTo>
-                    <a:pt x="5514037" y="3408073"/>
-                  </a:lnTo>
-                  <a:lnTo>
-                    <a:pt x="5585659" y="3411745"/>
-                  </a:lnTo>
-                  <a:lnTo>
-                    <a:pt x="5657282" y="3415239"/>
-                  </a:lnTo>
-                  <a:lnTo>
-                    <a:pt x="5728904" y="3418563"/>
-                  </a:lnTo>
-                  <a:lnTo>
-                    <a:pt x="5800527" y="3421726"/>
-                  </a:lnTo>
-                  <a:lnTo>
-                    <a:pt x="5872149" y="3424735"/>
-                  </a:lnTo>
-                  <a:lnTo>
-                    <a:pt x="5943772" y="3427599"/>
-                  </a:lnTo>
-                  <a:lnTo>
-                    <a:pt x="6015394" y="3430323"/>
+                    <a:pt x="65772" y="156194"/>
+                  </a:lnTo>
+                  <a:lnTo>
+                    <a:pt x="137394" y="318011"/>
+                  </a:lnTo>
+                  <a:lnTo>
+                    <a:pt x="209017" y="471959"/>
+                  </a:lnTo>
+                  <a:lnTo>
+                    <a:pt x="280639" y="618420"/>
+                  </a:lnTo>
+                  <a:lnTo>
+                    <a:pt x="352262" y="757759"/>
+                  </a:lnTo>
+                  <a:lnTo>
+                    <a:pt x="423884" y="890322"/>
+                  </a:lnTo>
+                  <a:lnTo>
+                    <a:pt x="495507" y="1016438"/>
+                  </a:lnTo>
+                  <a:lnTo>
+                    <a:pt x="567129" y="1136422"/>
+                  </a:lnTo>
+                  <a:lnTo>
+                    <a:pt x="638752" y="1250571"/>
+                  </a:lnTo>
+                  <a:lnTo>
+                    <a:pt x="710375" y="1359169"/>
+                  </a:lnTo>
+                  <a:lnTo>
+                    <a:pt x="781997" y="1462486"/>
+                  </a:lnTo>
+                  <a:lnTo>
+                    <a:pt x="853620" y="1560778"/>
+                  </a:lnTo>
+                  <a:lnTo>
+                    <a:pt x="925242" y="1654291"/>
+                  </a:lnTo>
+                  <a:lnTo>
+                    <a:pt x="996865" y="1743256"/>
+                  </a:lnTo>
+                  <a:lnTo>
+                    <a:pt x="1068487" y="1827895"/>
+                  </a:lnTo>
+                  <a:lnTo>
+                    <a:pt x="1140110" y="1908418"/>
+                  </a:lnTo>
+                  <a:lnTo>
+                    <a:pt x="1211732" y="1985025"/>
+                  </a:lnTo>
+                  <a:lnTo>
+                    <a:pt x="1283355" y="2057907"/>
+                  </a:lnTo>
+                  <a:lnTo>
+                    <a:pt x="1354977" y="2127245"/>
+                  </a:lnTo>
+                  <a:lnTo>
+                    <a:pt x="1426600" y="2193210"/>
+                  </a:lnTo>
+                  <a:lnTo>
+                    <a:pt x="1498222" y="2255968"/>
+                  </a:lnTo>
+                  <a:lnTo>
+                    <a:pt x="1569845" y="2315674"/>
+                  </a:lnTo>
+                  <a:lnTo>
+                    <a:pt x="1641467" y="2372477"/>
+                  </a:lnTo>
+                  <a:lnTo>
+                    <a:pt x="1713090" y="2426517"/>
+                  </a:lnTo>
+                  <a:lnTo>
+                    <a:pt x="1784712" y="2477930"/>
+                  </a:lnTo>
+                  <a:lnTo>
+                    <a:pt x="1856335" y="2526842"/>
+                  </a:lnTo>
+                  <a:lnTo>
+                    <a:pt x="1927957" y="2573376"/>
+                  </a:lnTo>
+                  <a:lnTo>
+                    <a:pt x="1999580" y="2617646"/>
+                  </a:lnTo>
+                  <a:lnTo>
+                    <a:pt x="2071203" y="2659764"/>
+                  </a:lnTo>
+                  <a:lnTo>
+                    <a:pt x="2142825" y="2699834"/>
+                  </a:lnTo>
+                  <a:lnTo>
+                    <a:pt x="2214448" y="2737955"/>
+                  </a:lnTo>
+                  <a:lnTo>
+                    <a:pt x="2286070" y="2774222"/>
+                  </a:lnTo>
+                  <a:lnTo>
+                    <a:pt x="2357693" y="2808726"/>
+                  </a:lnTo>
+                  <a:lnTo>
+                    <a:pt x="2429315" y="2841552"/>
+                  </a:lnTo>
+                  <a:lnTo>
+                    <a:pt x="2500938" y="2872781"/>
+                  </a:lnTo>
+                  <a:lnTo>
+                    <a:pt x="2572560" y="2902492"/>
+                  </a:lnTo>
+                  <a:lnTo>
+                    <a:pt x="2644183" y="2930758"/>
+                  </a:lnTo>
+                  <a:lnTo>
+                    <a:pt x="2715805" y="2957650"/>
+                  </a:lnTo>
+                  <a:lnTo>
+                    <a:pt x="2787428" y="2983233"/>
+                  </a:lnTo>
+                  <a:lnTo>
+                    <a:pt x="2859050" y="3007573"/>
+                  </a:lnTo>
+                  <a:lnTo>
+                    <a:pt x="2930673" y="3030729"/>
+                  </a:lnTo>
+                  <a:lnTo>
+                    <a:pt x="3002295" y="3052759"/>
+                  </a:lnTo>
+                  <a:lnTo>
+                    <a:pt x="3073918" y="3073718"/>
+                  </a:lnTo>
+                  <a:lnTo>
+                    <a:pt x="3145540" y="3093657"/>
+                  </a:lnTo>
+                  <a:lnTo>
+                    <a:pt x="3217163" y="3112627"/>
+                  </a:lnTo>
+                  <a:lnTo>
+                    <a:pt x="3288785" y="3130674"/>
+                  </a:lnTo>
+                  <a:lnTo>
+                    <a:pt x="3360408" y="3147844"/>
+                  </a:lnTo>
+                  <a:lnTo>
+                    <a:pt x="3432031" y="3164179"/>
+                  </a:lnTo>
+                  <a:lnTo>
+                    <a:pt x="3503653" y="3179719"/>
+                  </a:lnTo>
+                  <a:lnTo>
+                    <a:pt x="3575276" y="3194504"/>
+                  </a:lnTo>
+                  <a:lnTo>
+                    <a:pt x="3646898" y="3208569"/>
+                  </a:lnTo>
+                  <a:lnTo>
+                    <a:pt x="3718521" y="3221951"/>
+                  </a:lnTo>
+                  <a:lnTo>
+                    <a:pt x="3790143" y="3234682"/>
+                  </a:lnTo>
+                  <a:lnTo>
+                    <a:pt x="3861766" y="3246794"/>
+                  </a:lnTo>
+                  <a:lnTo>
+                    <a:pt x="3933388" y="3258317"/>
+                  </a:lnTo>
+                  <a:lnTo>
+                    <a:pt x="4005011" y="3269279"/>
+                  </a:lnTo>
+                  <a:lnTo>
+                    <a:pt x="4076633" y="3279709"/>
+                  </a:lnTo>
+                  <a:lnTo>
+                    <a:pt x="4148256" y="3289631"/>
+                  </a:lnTo>
+                  <a:lnTo>
+                    <a:pt x="4219878" y="3299070"/>
+                  </a:lnTo>
+                  <a:lnTo>
+                    <a:pt x="4291501" y="3308051"/>
+                  </a:lnTo>
+                  <a:lnTo>
+                    <a:pt x="4363123" y="3316595"/>
+                  </a:lnTo>
+                  <a:lnTo>
+                    <a:pt x="4434746" y="3324724"/>
+                  </a:lnTo>
+                  <a:lnTo>
+                    <a:pt x="4506368" y="3332457"/>
+                  </a:lnTo>
+                  <a:lnTo>
+                    <a:pt x="4577991" y="3339814"/>
+                  </a:lnTo>
+                  <a:lnTo>
+                    <a:pt x="4649613" y="3346813"/>
+                  </a:lnTo>
+                  <a:lnTo>
+                    <a:pt x="4721236" y="3353472"/>
+                  </a:lnTo>
+                  <a:lnTo>
+                    <a:pt x="4792859" y="3359807"/>
+                  </a:lnTo>
+                  <a:lnTo>
+                    <a:pt x="4864481" y="3365834"/>
+                  </a:lnTo>
+                  <a:lnTo>
+                    <a:pt x="4936104" y="3371568"/>
+                  </a:lnTo>
+                  <a:lnTo>
+                    <a:pt x="5007726" y="3377024"/>
+                  </a:lnTo>
+                  <a:lnTo>
+                    <a:pt x="5079349" y="3382213"/>
+                  </a:lnTo>
+                  <a:lnTo>
+                    <a:pt x="5150971" y="3387151"/>
+                  </a:lnTo>
+                  <a:lnTo>
+                    <a:pt x="5222594" y="3391848"/>
+                  </a:lnTo>
+                  <a:lnTo>
+                    <a:pt x="5294216" y="3396317"/>
+                  </a:lnTo>
+                  <a:lnTo>
+                    <a:pt x="5365839" y="3400569"/>
+                  </a:lnTo>
+                  <a:lnTo>
+                    <a:pt x="5437461" y="3404614"/>
+                  </a:lnTo>
+                  <a:lnTo>
+                    <a:pt x="5509084" y="3408462"/>
+                  </a:lnTo>
+                  <a:lnTo>
+                    <a:pt x="5580706" y="3412123"/>
+                  </a:lnTo>
+                  <a:lnTo>
+                    <a:pt x="5652329" y="3415606"/>
+                  </a:lnTo>
+                  <a:lnTo>
+                    <a:pt x="5723951" y="3418920"/>
+                  </a:lnTo>
+                  <a:lnTo>
+                    <a:pt x="5795574" y="3422072"/>
+                  </a:lnTo>
+                  <a:lnTo>
+                    <a:pt x="5867196" y="3425071"/>
+                  </a:lnTo>
+                  <a:lnTo>
+                    <a:pt x="5938819" y="3427925"/>
+                  </a:lnTo>
+                  <a:lnTo>
+                    <a:pt x="6010441" y="3430639"/>
                   </a:lnTo>
                 </a:path>
               </a:pathLst>
@@ -4477,7 +4477,7 @@
           </p:nvSpPr>
           <p:spPr>
             <a:xfrm>
-              <a:off x="4313661" y="2073503"/>
+              <a:off x="4313914" y="2073503"/>
               <a:ext cx="0" cy="3649639"/>
             </a:xfrm>
             <a:custGeom>
@@ -4750,7 +4750,7 @@
           </p:nvSpPr>
           <p:spPr>
             <a:xfrm>
-              <a:off x="2280620" y="5785772"/>
+              <a:off x="2281218" y="5785772"/>
               <a:ext cx="161574" cy="80101"/>
             </a:xfrm>
             <a:prstGeom prst="rect">
@@ -4796,7 +4796,7 @@
           </p:nvSpPr>
           <p:spPr>
             <a:xfrm>
-              <a:off x="4204872" y="5785772"/>
+              <a:off x="4203472" y="5785772"/>
               <a:ext cx="62179" cy="80101"/>
             </a:xfrm>
             <a:prstGeom prst="rect">
@@ -4842,7 +4842,7 @@
           </p:nvSpPr>
           <p:spPr>
             <a:xfrm>
-              <a:off x="6048338" y="5785772"/>
+              <a:off x="6044938" y="5785772"/>
               <a:ext cx="124358" cy="80101"/>
             </a:xfrm>
             <a:prstGeom prst="rect">
@@ -4888,7 +4888,7 @@
           </p:nvSpPr>
           <p:spPr>
             <a:xfrm>
-              <a:off x="7922893" y="5785772"/>
+              <a:off x="7917494" y="5785772"/>
               <a:ext cx="124358" cy="80101"/>
             </a:xfrm>
             <a:prstGeom prst="rect">
@@ -5059,7 +5059,7 @@
                   <a:latin typeface="Helvetica"/>
                   <a:cs typeface="Helvetica"/>
                 </a:rPr>
-                <a:t>subHR per 10 % decline: 1.92 (1.44-2.55), p_Bonf = &lt;0.001 (n = 6)  |  per IQR decline (Δ = 25.8 %): 5.37 (2.57-11.24)  |  IQR: [-10.7, 15.1] %</a:t>
+                <a:t>subHR per 10 % decline: 1.92 (1.44-2.56), p_Bonf = &lt;0.001 (n = 6)  |  per IQR decline (Δ = 25.8 %): 5.37 (2.57-11.26)  |  IQR: [-10.6, 15.2] %</a:t>
               </a:r>
             </a:p>
           </p:txBody>
